--- a/projects/cns-pharmacology-practical/slides/ch08-general-anaesthetics.pptx
+++ b/projects/cns-pharmacology-practical/slides/ch08-general-anaesthetics.pptx
@@ -6587,7 +6587,7 @@
                 </a:solidFill>
                 <a:latin typeface="Calibri"/>
               </a:rPr>
-              <a:t>45 minutes  ·  10 questions</a:t>
+              <a:t>60 minutes  ·  10 questions</a:t>
             </a:r>
           </a:p>
         </p:txBody>
@@ -12573,7 +12573,7 @@
                 </a:solidFill>
                 <a:latin typeface="Cambria"/>
               </a:rPr>
-              <a:t>45</a:t>
+              <a:t>60</a:t>
             </a:r>
           </a:p>
           <a:p>

--- a/projects/cns-pharmacology-practical/slides/ch08-general-anaesthetics.pptx
+++ b/projects/cns-pharmacology-practical/slides/ch08-general-anaesthetics.pptx
@@ -6111,6 +6111,110 @@
         </p:nvSpPr>
         <p:spPr>
           <a:xfrm>
+            <a:off x="411479" y="1444752"/>
+            <a:ext cx="11368735" cy="4800600"/>
+          </a:xfrm>
+          <a:prstGeom prst="roundRect">
+            <a:avLst>
+              <a:gd name="adj" fmla="val 4000"/>
+            </a:avLst>
+          </a:prstGeom>
+          <a:solidFill>
+            <a:srgbClr val="FFFFFF">
+              <a:alpha val="84000"/>
+            </a:srgbClr>
+          </a:solidFill>
+          <a:ln w="19050">
+            <a:solidFill>
+              <a:srgbClr val="FFFFFF"/>
+            </a:solidFill>
+          </a:ln>
+          <a:effectLst>
+            <a:outerShdw blurRad="203200" dist="50800" dir="5400000" algn="t" rotWithShape="0">
+              <a:srgbClr val="1A2340">
+                <a:alpha val="20000"/>
+              </a:srgbClr>
+            </a:outerShdw>
+          </a:effectLst>
+        </p:spPr>
+        <p:style>
+          <a:lnRef idx="1">
+            <a:schemeClr val="accent1"/>
+          </a:lnRef>
+          <a:fillRef idx="3">
+            <a:schemeClr val="accent1"/>
+          </a:fillRef>
+          <a:effectRef idx="2">
+            <a:schemeClr val="accent1"/>
+          </a:effectRef>
+          <a:fontRef idx="minor">
+            <a:schemeClr val="lt1"/>
+          </a:fontRef>
+        </p:style>
+        <p:txBody>
+          <a:bodyPr rtlCol="0" anchor="ctr"/>
+          <a:lstStyle/>
+          <a:p>
+            <a:pPr algn="ctr"/>
+          </a:p>
+        </p:txBody>
+      </p:sp>
+      <p:sp>
+        <p:nvSpPr>
+          <p:cNvPr id="12" name="Rounded Rectangle 11"/>
+          <p:cNvSpPr/>
+          <p:nvPr/>
+        </p:nvSpPr>
+        <p:spPr>
+          <a:xfrm>
+            <a:off x="731519" y="1508760"/>
+            <a:ext cx="10728655" cy="32004"/>
+          </a:xfrm>
+          <a:prstGeom prst="roundRect">
+            <a:avLst>
+              <a:gd name="adj" fmla="val 50000"/>
+            </a:avLst>
+          </a:prstGeom>
+          <a:solidFill>
+            <a:srgbClr val="FFFFFF">
+              <a:alpha val="85000"/>
+            </a:srgbClr>
+          </a:solidFill>
+          <a:ln>
+            <a:noFill/>
+          </a:ln>
+          <a:effectLst/>
+        </p:spPr>
+        <p:style>
+          <a:lnRef idx="1">
+            <a:schemeClr val="accent1"/>
+          </a:lnRef>
+          <a:fillRef idx="3">
+            <a:schemeClr val="accent1"/>
+          </a:fillRef>
+          <a:effectRef idx="2">
+            <a:schemeClr val="accent1"/>
+          </a:effectRef>
+          <a:fontRef idx="minor">
+            <a:schemeClr val="lt1"/>
+          </a:fontRef>
+        </p:style>
+        <p:txBody>
+          <a:bodyPr rtlCol="0" anchor="ctr"/>
+          <a:lstStyle/>
+          <a:p>
+            <a:pPr algn="ctr"/>
+          </a:p>
+        </p:txBody>
+      </p:sp>
+      <p:sp>
+        <p:nvSpPr>
+          <p:cNvPr id="13" name="Rounded Rectangle 12"/>
+          <p:cNvSpPr/>
+          <p:nvPr/>
+        </p:nvSpPr>
+        <p:spPr>
+          <a:xfrm>
             <a:off x="1645919" y="2103120"/>
             <a:ext cx="8899855" cy="2431288"/>
           </a:xfrm>
@@ -6161,7 +6265,7 @@
       </p:sp>
       <p:sp>
         <p:nvSpPr>
-          <p:cNvPr id="12" name="Rounded Rectangle 11"/>
+          <p:cNvPr id="14" name="Rounded Rectangle 13"/>
           <p:cNvSpPr/>
           <p:nvPr/>
         </p:nvSpPr>
@@ -6209,7 +6313,7 @@
       </p:sp>
       <p:sp>
         <p:nvSpPr>
-          <p:cNvPr id="13" name="Rounded Rectangle 12"/>
+          <p:cNvPr id="15" name="Rounded Rectangle 14"/>
           <p:cNvSpPr/>
           <p:nvPr/>
         </p:nvSpPr>
@@ -6277,7 +6381,7 @@
       </p:sp>
       <p:sp>
         <p:nvSpPr>
-          <p:cNvPr id="14" name="TextBox 13"/>
+          <p:cNvPr id="16" name="TextBox 15"/>
           <p:cNvSpPr txBox="1"/>
           <p:nvPr/>
         </p:nvSpPr>
@@ -6731,9 +6835,113 @@
           </a:prstGeom>
         </p:spPr>
       </p:pic>
+      <p:sp>
+        <p:nvSpPr>
+          <p:cNvPr id="11" name="Rounded Rectangle 10"/>
+          <p:cNvSpPr/>
+          <p:nvPr/>
+        </p:nvSpPr>
+        <p:spPr>
+          <a:xfrm>
+            <a:off x="411479" y="1444752"/>
+            <a:ext cx="11368735" cy="4800600"/>
+          </a:xfrm>
+          <a:prstGeom prst="roundRect">
+            <a:avLst>
+              <a:gd name="adj" fmla="val 4000"/>
+            </a:avLst>
+          </a:prstGeom>
+          <a:solidFill>
+            <a:srgbClr val="FFFFFF">
+              <a:alpha val="84000"/>
+            </a:srgbClr>
+          </a:solidFill>
+          <a:ln w="19050">
+            <a:solidFill>
+              <a:srgbClr val="FFFFFF"/>
+            </a:solidFill>
+          </a:ln>
+          <a:effectLst>
+            <a:outerShdw blurRad="203200" dist="50800" dir="5400000" algn="t" rotWithShape="0">
+              <a:srgbClr val="1A2340">
+                <a:alpha val="20000"/>
+              </a:srgbClr>
+            </a:outerShdw>
+          </a:effectLst>
+        </p:spPr>
+        <p:style>
+          <a:lnRef idx="1">
+            <a:schemeClr val="accent1"/>
+          </a:lnRef>
+          <a:fillRef idx="3">
+            <a:schemeClr val="accent1"/>
+          </a:fillRef>
+          <a:effectRef idx="2">
+            <a:schemeClr val="accent1"/>
+          </a:effectRef>
+          <a:fontRef idx="minor">
+            <a:schemeClr val="lt1"/>
+          </a:fontRef>
+        </p:style>
+        <p:txBody>
+          <a:bodyPr rtlCol="0" anchor="ctr"/>
+          <a:lstStyle/>
+          <a:p>
+            <a:pPr algn="ctr"/>
+          </a:p>
+        </p:txBody>
+      </p:sp>
+      <p:sp>
+        <p:nvSpPr>
+          <p:cNvPr id="12" name="Rounded Rectangle 11"/>
+          <p:cNvSpPr/>
+          <p:nvPr/>
+        </p:nvSpPr>
+        <p:spPr>
+          <a:xfrm>
+            <a:off x="731519" y="1508760"/>
+            <a:ext cx="10728655" cy="32004"/>
+          </a:xfrm>
+          <a:prstGeom prst="roundRect">
+            <a:avLst>
+              <a:gd name="adj" fmla="val 50000"/>
+            </a:avLst>
+          </a:prstGeom>
+          <a:solidFill>
+            <a:srgbClr val="FFFFFF">
+              <a:alpha val="85000"/>
+            </a:srgbClr>
+          </a:solidFill>
+          <a:ln>
+            <a:noFill/>
+          </a:ln>
+          <a:effectLst/>
+        </p:spPr>
+        <p:style>
+          <a:lnRef idx="1">
+            <a:schemeClr val="accent1"/>
+          </a:lnRef>
+          <a:fillRef idx="3">
+            <a:schemeClr val="accent1"/>
+          </a:fillRef>
+          <a:effectRef idx="2">
+            <a:schemeClr val="accent1"/>
+          </a:effectRef>
+          <a:fontRef idx="minor">
+            <a:schemeClr val="lt1"/>
+          </a:fontRef>
+        </p:style>
+        <p:txBody>
+          <a:bodyPr rtlCol="0" anchor="ctr"/>
+          <a:lstStyle/>
+          <a:p>
+            <a:pPr algn="ctr"/>
+          </a:p>
+        </p:txBody>
+      </p:sp>
       <p:graphicFrame>
         <p:nvGraphicFramePr>
-          <p:cNvPr id="11" name="Table 10"/>
+          <p:cNvPr id="13" name="Table 12"/>
           <p:cNvGraphicFramePr>
             <a:graphicFrameLocks noGrp="1"/>
           </p:cNvGraphicFramePr>
@@ -7351,6 +7559,110 @@
       </p:pic>
       <p:sp>
         <p:nvSpPr>
+          <p:cNvPr id="10" name="Rounded Rectangle 9"/>
+          <p:cNvSpPr/>
+          <p:nvPr/>
+        </p:nvSpPr>
+        <p:spPr>
+          <a:xfrm>
+            <a:off x="4251960" y="548640"/>
+            <a:ext cx="7635240" cy="5715000"/>
+          </a:xfrm>
+          <a:prstGeom prst="roundRect">
+            <a:avLst>
+              <a:gd name="adj" fmla="val 4000"/>
+            </a:avLst>
+          </a:prstGeom>
+          <a:solidFill>
+            <a:srgbClr val="FFFFFF">
+              <a:alpha val="84000"/>
+            </a:srgbClr>
+          </a:solidFill>
+          <a:ln w="19050">
+            <a:solidFill>
+              <a:srgbClr val="FFFFFF"/>
+            </a:solidFill>
+          </a:ln>
+          <a:effectLst>
+            <a:outerShdw blurRad="203200" dist="50800" dir="5400000" algn="t" rotWithShape="0">
+              <a:srgbClr val="1A2340">
+                <a:alpha val="20000"/>
+              </a:srgbClr>
+            </a:outerShdw>
+          </a:effectLst>
+        </p:spPr>
+        <p:style>
+          <a:lnRef idx="1">
+            <a:schemeClr val="accent1"/>
+          </a:lnRef>
+          <a:fillRef idx="3">
+            <a:schemeClr val="accent1"/>
+          </a:fillRef>
+          <a:effectRef idx="2">
+            <a:schemeClr val="accent1"/>
+          </a:effectRef>
+          <a:fontRef idx="minor">
+            <a:schemeClr val="lt1"/>
+          </a:fontRef>
+        </p:style>
+        <p:txBody>
+          <a:bodyPr rtlCol="0" anchor="ctr"/>
+          <a:lstStyle/>
+          <a:p>
+            <a:pPr algn="ctr"/>
+          </a:p>
+        </p:txBody>
+      </p:sp>
+      <p:sp>
+        <p:nvSpPr>
+          <p:cNvPr id="11" name="Rounded Rectangle 10"/>
+          <p:cNvSpPr/>
+          <p:nvPr/>
+        </p:nvSpPr>
+        <p:spPr>
+          <a:xfrm>
+            <a:off x="4572000" y="612647"/>
+            <a:ext cx="6995159" cy="32004"/>
+          </a:xfrm>
+          <a:prstGeom prst="roundRect">
+            <a:avLst>
+              <a:gd name="adj" fmla="val 50000"/>
+            </a:avLst>
+          </a:prstGeom>
+          <a:solidFill>
+            <a:srgbClr val="FFFFFF">
+              <a:alpha val="85000"/>
+            </a:srgbClr>
+          </a:solidFill>
+          <a:ln>
+            <a:noFill/>
+          </a:ln>
+          <a:effectLst/>
+        </p:spPr>
+        <p:style>
+          <a:lnRef idx="1">
+            <a:schemeClr val="accent1"/>
+          </a:lnRef>
+          <a:fillRef idx="3">
+            <a:schemeClr val="accent1"/>
+          </a:fillRef>
+          <a:effectRef idx="2">
+            <a:schemeClr val="accent1"/>
+          </a:effectRef>
+          <a:fontRef idx="minor">
+            <a:schemeClr val="lt1"/>
+          </a:fontRef>
+        </p:style>
+        <p:txBody>
+          <a:bodyPr rtlCol="0" anchor="ctr"/>
+          <a:lstStyle/>
+          <a:p>
+            <a:pPr algn="ctr"/>
+          </a:p>
+        </p:txBody>
+      </p:sp>
+      <p:sp>
+        <p:nvSpPr>
           <p:cNvPr id="3" name="Rectangle 2"/>
           <p:cNvSpPr/>
           <p:nvPr/>
@@ -8041,7 +8353,111 @@
       </p:pic>
       <p:sp>
         <p:nvSpPr>
-          <p:cNvPr id="11" name="Oval 10"/>
+          <p:cNvPr id="11" name="Rounded Rectangle 10"/>
+          <p:cNvSpPr/>
+          <p:nvPr/>
+        </p:nvSpPr>
+        <p:spPr>
+          <a:xfrm>
+            <a:off x="411479" y="1444752"/>
+            <a:ext cx="11368735" cy="4800600"/>
+          </a:xfrm>
+          <a:prstGeom prst="roundRect">
+            <a:avLst>
+              <a:gd name="adj" fmla="val 4000"/>
+            </a:avLst>
+          </a:prstGeom>
+          <a:solidFill>
+            <a:srgbClr val="FFFFFF">
+              <a:alpha val="84000"/>
+            </a:srgbClr>
+          </a:solidFill>
+          <a:ln w="19050">
+            <a:solidFill>
+              <a:srgbClr val="FFFFFF"/>
+            </a:solidFill>
+          </a:ln>
+          <a:effectLst>
+            <a:outerShdw blurRad="203200" dist="50800" dir="5400000" algn="t" rotWithShape="0">
+              <a:srgbClr val="1A2340">
+                <a:alpha val="20000"/>
+              </a:srgbClr>
+            </a:outerShdw>
+          </a:effectLst>
+        </p:spPr>
+        <p:style>
+          <a:lnRef idx="1">
+            <a:schemeClr val="accent1"/>
+          </a:lnRef>
+          <a:fillRef idx="3">
+            <a:schemeClr val="accent1"/>
+          </a:fillRef>
+          <a:effectRef idx="2">
+            <a:schemeClr val="accent1"/>
+          </a:effectRef>
+          <a:fontRef idx="minor">
+            <a:schemeClr val="lt1"/>
+          </a:fontRef>
+        </p:style>
+        <p:txBody>
+          <a:bodyPr rtlCol="0" anchor="ctr"/>
+          <a:lstStyle/>
+          <a:p>
+            <a:pPr algn="ctr"/>
+          </a:p>
+        </p:txBody>
+      </p:sp>
+      <p:sp>
+        <p:nvSpPr>
+          <p:cNvPr id="12" name="Rounded Rectangle 11"/>
+          <p:cNvSpPr/>
+          <p:nvPr/>
+        </p:nvSpPr>
+        <p:spPr>
+          <a:xfrm>
+            <a:off x="731519" y="1508760"/>
+            <a:ext cx="10728655" cy="32004"/>
+          </a:xfrm>
+          <a:prstGeom prst="roundRect">
+            <a:avLst>
+              <a:gd name="adj" fmla="val 50000"/>
+            </a:avLst>
+          </a:prstGeom>
+          <a:solidFill>
+            <a:srgbClr val="FFFFFF">
+              <a:alpha val="85000"/>
+            </a:srgbClr>
+          </a:solidFill>
+          <a:ln>
+            <a:noFill/>
+          </a:ln>
+          <a:effectLst/>
+        </p:spPr>
+        <p:style>
+          <a:lnRef idx="1">
+            <a:schemeClr val="accent1"/>
+          </a:lnRef>
+          <a:fillRef idx="3">
+            <a:schemeClr val="accent1"/>
+          </a:fillRef>
+          <a:effectRef idx="2">
+            <a:schemeClr val="accent1"/>
+          </a:effectRef>
+          <a:fontRef idx="minor">
+            <a:schemeClr val="lt1"/>
+          </a:fontRef>
+        </p:style>
+        <p:txBody>
+          <a:bodyPr rtlCol="0" anchor="ctr"/>
+          <a:lstStyle/>
+          <a:p>
+            <a:pPr algn="ctr"/>
+          </a:p>
+        </p:txBody>
+      </p:sp>
+      <p:sp>
+        <p:nvSpPr>
+          <p:cNvPr id="13" name="Oval 12"/>
           <p:cNvSpPr/>
           <p:nvPr/>
         </p:nvSpPr>
@@ -8094,7 +8510,7 @@
       </p:sp>
       <p:sp>
         <p:nvSpPr>
-          <p:cNvPr id="12" name="TextBox 11"/>
+          <p:cNvPr id="14" name="TextBox 13"/>
           <p:cNvSpPr txBox="1"/>
           <p:nvPr/>
         </p:nvSpPr>
@@ -8164,7 +8580,7 @@
       </p:sp>
       <p:sp>
         <p:nvSpPr>
-          <p:cNvPr id="13" name="Oval 12"/>
+          <p:cNvPr id="15" name="Oval 14"/>
           <p:cNvSpPr/>
           <p:nvPr/>
         </p:nvSpPr>
@@ -8217,7 +8633,7 @@
       </p:sp>
       <p:sp>
         <p:nvSpPr>
-          <p:cNvPr id="14" name="TextBox 13"/>
+          <p:cNvPr id="16" name="TextBox 15"/>
           <p:cNvSpPr txBox="1"/>
           <p:nvPr/>
         </p:nvSpPr>
@@ -8656,6 +9072,110 @@
         </p:nvSpPr>
         <p:spPr>
           <a:xfrm>
+            <a:off x="411479" y="1444752"/>
+            <a:ext cx="11368735" cy="4800600"/>
+          </a:xfrm>
+          <a:prstGeom prst="roundRect">
+            <a:avLst>
+              <a:gd name="adj" fmla="val 4000"/>
+            </a:avLst>
+          </a:prstGeom>
+          <a:solidFill>
+            <a:srgbClr val="FFFFFF">
+              <a:alpha val="84000"/>
+            </a:srgbClr>
+          </a:solidFill>
+          <a:ln w="19050">
+            <a:solidFill>
+              <a:srgbClr val="FFFFFF"/>
+            </a:solidFill>
+          </a:ln>
+          <a:effectLst>
+            <a:outerShdw blurRad="203200" dist="50800" dir="5400000" algn="t" rotWithShape="0">
+              <a:srgbClr val="1A2340">
+                <a:alpha val="20000"/>
+              </a:srgbClr>
+            </a:outerShdw>
+          </a:effectLst>
+        </p:spPr>
+        <p:style>
+          <a:lnRef idx="1">
+            <a:schemeClr val="accent1"/>
+          </a:lnRef>
+          <a:fillRef idx="3">
+            <a:schemeClr val="accent1"/>
+          </a:fillRef>
+          <a:effectRef idx="2">
+            <a:schemeClr val="accent1"/>
+          </a:effectRef>
+          <a:fontRef idx="minor">
+            <a:schemeClr val="lt1"/>
+          </a:fontRef>
+        </p:style>
+        <p:txBody>
+          <a:bodyPr rtlCol="0" anchor="ctr"/>
+          <a:lstStyle/>
+          <a:p>
+            <a:pPr algn="ctr"/>
+          </a:p>
+        </p:txBody>
+      </p:sp>
+      <p:sp>
+        <p:nvSpPr>
+          <p:cNvPr id="12" name="Rounded Rectangle 11"/>
+          <p:cNvSpPr/>
+          <p:nvPr/>
+        </p:nvSpPr>
+        <p:spPr>
+          <a:xfrm>
+            <a:off x="731519" y="1508760"/>
+            <a:ext cx="10728655" cy="32004"/>
+          </a:xfrm>
+          <a:prstGeom prst="roundRect">
+            <a:avLst>
+              <a:gd name="adj" fmla="val 50000"/>
+            </a:avLst>
+          </a:prstGeom>
+          <a:solidFill>
+            <a:srgbClr val="FFFFFF">
+              <a:alpha val="85000"/>
+            </a:srgbClr>
+          </a:solidFill>
+          <a:ln>
+            <a:noFill/>
+          </a:ln>
+          <a:effectLst/>
+        </p:spPr>
+        <p:style>
+          <a:lnRef idx="1">
+            <a:schemeClr val="accent1"/>
+          </a:lnRef>
+          <a:fillRef idx="3">
+            <a:schemeClr val="accent1"/>
+          </a:fillRef>
+          <a:effectRef idx="2">
+            <a:schemeClr val="accent1"/>
+          </a:effectRef>
+          <a:fontRef idx="minor">
+            <a:schemeClr val="lt1"/>
+          </a:fontRef>
+        </p:style>
+        <p:txBody>
+          <a:bodyPr rtlCol="0" anchor="ctr"/>
+          <a:lstStyle/>
+          <a:p>
+            <a:pPr algn="ctr"/>
+          </a:p>
+        </p:txBody>
+      </p:sp>
+      <p:sp>
+        <p:nvSpPr>
+          <p:cNvPr id="13" name="Rounded Rectangle 12"/>
+          <p:cNvSpPr/>
+          <p:nvPr/>
+        </p:nvSpPr>
+        <p:spPr>
+          <a:xfrm>
             <a:off x="1645919" y="2103120"/>
             <a:ext cx="8899855" cy="2431288"/>
           </a:xfrm>
@@ -8706,7 +9226,7 @@
       </p:sp>
       <p:sp>
         <p:nvSpPr>
-          <p:cNvPr id="12" name="Rounded Rectangle 11"/>
+          <p:cNvPr id="14" name="Rounded Rectangle 13"/>
           <p:cNvSpPr/>
           <p:nvPr/>
         </p:nvSpPr>
@@ -8754,7 +9274,7 @@
       </p:sp>
       <p:sp>
         <p:nvSpPr>
-          <p:cNvPr id="13" name="Rounded Rectangle 12"/>
+          <p:cNvPr id="15" name="Rounded Rectangle 14"/>
           <p:cNvSpPr/>
           <p:nvPr/>
         </p:nvSpPr>
@@ -8822,7 +9342,7 @@
       </p:sp>
       <p:sp>
         <p:nvSpPr>
-          <p:cNvPr id="14" name="TextBox 13"/>
+          <p:cNvPr id="16" name="TextBox 15"/>
           <p:cNvSpPr txBox="1"/>
           <p:nvPr/>
         </p:nvSpPr>
@@ -9240,9 +9760,113 @@
           </a:prstGeom>
         </p:spPr>
       </p:pic>
+      <p:sp>
+        <p:nvSpPr>
+          <p:cNvPr id="11" name="Rounded Rectangle 10"/>
+          <p:cNvSpPr/>
+          <p:nvPr/>
+        </p:nvSpPr>
+        <p:spPr>
+          <a:xfrm>
+            <a:off x="411479" y="1444752"/>
+            <a:ext cx="11368735" cy="4800600"/>
+          </a:xfrm>
+          <a:prstGeom prst="roundRect">
+            <a:avLst>
+              <a:gd name="adj" fmla="val 4000"/>
+            </a:avLst>
+          </a:prstGeom>
+          <a:solidFill>
+            <a:srgbClr val="FFFFFF">
+              <a:alpha val="84000"/>
+            </a:srgbClr>
+          </a:solidFill>
+          <a:ln w="19050">
+            <a:solidFill>
+              <a:srgbClr val="FFFFFF"/>
+            </a:solidFill>
+          </a:ln>
+          <a:effectLst>
+            <a:outerShdw blurRad="203200" dist="50800" dir="5400000" algn="t" rotWithShape="0">
+              <a:srgbClr val="1A2340">
+                <a:alpha val="20000"/>
+              </a:srgbClr>
+            </a:outerShdw>
+          </a:effectLst>
+        </p:spPr>
+        <p:style>
+          <a:lnRef idx="1">
+            <a:schemeClr val="accent1"/>
+          </a:lnRef>
+          <a:fillRef idx="3">
+            <a:schemeClr val="accent1"/>
+          </a:fillRef>
+          <a:effectRef idx="2">
+            <a:schemeClr val="accent1"/>
+          </a:effectRef>
+          <a:fontRef idx="minor">
+            <a:schemeClr val="lt1"/>
+          </a:fontRef>
+        </p:style>
+        <p:txBody>
+          <a:bodyPr rtlCol="0" anchor="ctr"/>
+          <a:lstStyle/>
+          <a:p>
+            <a:pPr algn="ctr"/>
+          </a:p>
+        </p:txBody>
+      </p:sp>
+      <p:sp>
+        <p:nvSpPr>
+          <p:cNvPr id="12" name="Rounded Rectangle 11"/>
+          <p:cNvSpPr/>
+          <p:nvPr/>
+        </p:nvSpPr>
+        <p:spPr>
+          <a:xfrm>
+            <a:off x="731519" y="1508760"/>
+            <a:ext cx="10728655" cy="32004"/>
+          </a:xfrm>
+          <a:prstGeom prst="roundRect">
+            <a:avLst>
+              <a:gd name="adj" fmla="val 50000"/>
+            </a:avLst>
+          </a:prstGeom>
+          <a:solidFill>
+            <a:srgbClr val="FFFFFF">
+              <a:alpha val="85000"/>
+            </a:srgbClr>
+          </a:solidFill>
+          <a:ln>
+            <a:noFill/>
+          </a:ln>
+          <a:effectLst/>
+        </p:spPr>
+        <p:style>
+          <a:lnRef idx="1">
+            <a:schemeClr val="accent1"/>
+          </a:lnRef>
+          <a:fillRef idx="3">
+            <a:schemeClr val="accent1"/>
+          </a:fillRef>
+          <a:effectRef idx="2">
+            <a:schemeClr val="accent1"/>
+          </a:effectRef>
+          <a:fontRef idx="minor">
+            <a:schemeClr val="lt1"/>
+          </a:fontRef>
+        </p:style>
+        <p:txBody>
+          <a:bodyPr rtlCol="0" anchor="ctr"/>
+          <a:lstStyle/>
+          <a:p>
+            <a:pPr algn="ctr"/>
+          </a:p>
+        </p:txBody>
+      </p:sp>
       <p:graphicFrame>
         <p:nvGraphicFramePr>
-          <p:cNvPr id="11" name="Table 10"/>
+          <p:cNvPr id="13" name="Table 12"/>
           <p:cNvGraphicFramePr>
             <a:graphicFrameLocks noGrp="1"/>
           </p:cNvGraphicFramePr>
@@ -9922,7 +10546,111 @@
       </p:pic>
       <p:sp>
         <p:nvSpPr>
-          <p:cNvPr id="11" name="Oval 10"/>
+          <p:cNvPr id="11" name="Rounded Rectangle 10"/>
+          <p:cNvSpPr/>
+          <p:nvPr/>
+        </p:nvSpPr>
+        <p:spPr>
+          <a:xfrm>
+            <a:off x="411479" y="1444752"/>
+            <a:ext cx="11368735" cy="4800600"/>
+          </a:xfrm>
+          <a:prstGeom prst="roundRect">
+            <a:avLst>
+              <a:gd name="adj" fmla="val 4000"/>
+            </a:avLst>
+          </a:prstGeom>
+          <a:solidFill>
+            <a:srgbClr val="FFFFFF">
+              <a:alpha val="84000"/>
+            </a:srgbClr>
+          </a:solidFill>
+          <a:ln w="19050">
+            <a:solidFill>
+              <a:srgbClr val="FFFFFF"/>
+            </a:solidFill>
+          </a:ln>
+          <a:effectLst>
+            <a:outerShdw blurRad="203200" dist="50800" dir="5400000" algn="t" rotWithShape="0">
+              <a:srgbClr val="1A2340">
+                <a:alpha val="20000"/>
+              </a:srgbClr>
+            </a:outerShdw>
+          </a:effectLst>
+        </p:spPr>
+        <p:style>
+          <a:lnRef idx="1">
+            <a:schemeClr val="accent1"/>
+          </a:lnRef>
+          <a:fillRef idx="3">
+            <a:schemeClr val="accent1"/>
+          </a:fillRef>
+          <a:effectRef idx="2">
+            <a:schemeClr val="accent1"/>
+          </a:effectRef>
+          <a:fontRef idx="minor">
+            <a:schemeClr val="lt1"/>
+          </a:fontRef>
+        </p:style>
+        <p:txBody>
+          <a:bodyPr rtlCol="0" anchor="ctr"/>
+          <a:lstStyle/>
+          <a:p>
+            <a:pPr algn="ctr"/>
+          </a:p>
+        </p:txBody>
+      </p:sp>
+      <p:sp>
+        <p:nvSpPr>
+          <p:cNvPr id="12" name="Rounded Rectangle 11"/>
+          <p:cNvSpPr/>
+          <p:nvPr/>
+        </p:nvSpPr>
+        <p:spPr>
+          <a:xfrm>
+            <a:off x="731519" y="1508760"/>
+            <a:ext cx="10728655" cy="32004"/>
+          </a:xfrm>
+          <a:prstGeom prst="roundRect">
+            <a:avLst>
+              <a:gd name="adj" fmla="val 50000"/>
+            </a:avLst>
+          </a:prstGeom>
+          <a:solidFill>
+            <a:srgbClr val="FFFFFF">
+              <a:alpha val="85000"/>
+            </a:srgbClr>
+          </a:solidFill>
+          <a:ln>
+            <a:noFill/>
+          </a:ln>
+          <a:effectLst/>
+        </p:spPr>
+        <p:style>
+          <a:lnRef idx="1">
+            <a:schemeClr val="accent1"/>
+          </a:lnRef>
+          <a:fillRef idx="3">
+            <a:schemeClr val="accent1"/>
+          </a:fillRef>
+          <a:effectRef idx="2">
+            <a:schemeClr val="accent1"/>
+          </a:effectRef>
+          <a:fontRef idx="minor">
+            <a:schemeClr val="lt1"/>
+          </a:fontRef>
+        </p:style>
+        <p:txBody>
+          <a:bodyPr rtlCol="0" anchor="ctr"/>
+          <a:lstStyle/>
+          <a:p>
+            <a:pPr algn="ctr"/>
+          </a:p>
+        </p:txBody>
+      </p:sp>
+      <p:sp>
+        <p:nvSpPr>
+          <p:cNvPr id="13" name="Oval 12"/>
           <p:cNvSpPr/>
           <p:nvPr/>
         </p:nvSpPr>
@@ -9975,7 +10703,7 @@
       </p:sp>
       <p:sp>
         <p:nvSpPr>
-          <p:cNvPr id="12" name="TextBox 11"/>
+          <p:cNvPr id="14" name="TextBox 13"/>
           <p:cNvSpPr txBox="1"/>
           <p:nvPr/>
         </p:nvSpPr>
@@ -10009,7 +10737,7 @@
       </p:sp>
       <p:sp>
         <p:nvSpPr>
-          <p:cNvPr id="13" name="Oval 12"/>
+          <p:cNvPr id="15" name="Oval 14"/>
           <p:cNvSpPr/>
           <p:nvPr/>
         </p:nvSpPr>
@@ -10062,7 +10790,7 @@
       </p:sp>
       <p:sp>
         <p:nvSpPr>
-          <p:cNvPr id="14" name="TextBox 13"/>
+          <p:cNvPr id="16" name="TextBox 15"/>
           <p:cNvSpPr txBox="1"/>
           <p:nvPr/>
         </p:nvSpPr>
@@ -10096,7 +10824,7 @@
       </p:sp>
       <p:sp>
         <p:nvSpPr>
-          <p:cNvPr id="15" name="Oval 14"/>
+          <p:cNvPr id="17" name="Oval 16"/>
           <p:cNvSpPr/>
           <p:nvPr/>
         </p:nvSpPr>
@@ -10149,7 +10877,7 @@
       </p:sp>
       <p:sp>
         <p:nvSpPr>
-          <p:cNvPr id="16" name="TextBox 15"/>
+          <p:cNvPr id="18" name="TextBox 17"/>
           <p:cNvSpPr txBox="1"/>
           <p:nvPr/>
         </p:nvSpPr>
@@ -10564,7 +11292,111 @@
       </p:pic>
       <p:sp>
         <p:nvSpPr>
-          <p:cNvPr id="11" name="TextBox 10"/>
+          <p:cNvPr id="11" name="Rounded Rectangle 10"/>
+          <p:cNvSpPr/>
+          <p:nvPr/>
+        </p:nvSpPr>
+        <p:spPr>
+          <a:xfrm>
+            <a:off x="411479" y="1444752"/>
+            <a:ext cx="11368735" cy="4800600"/>
+          </a:xfrm>
+          <a:prstGeom prst="roundRect">
+            <a:avLst>
+              <a:gd name="adj" fmla="val 4000"/>
+            </a:avLst>
+          </a:prstGeom>
+          <a:solidFill>
+            <a:srgbClr val="FFFFFF">
+              <a:alpha val="84000"/>
+            </a:srgbClr>
+          </a:solidFill>
+          <a:ln w="19050">
+            <a:solidFill>
+              <a:srgbClr val="FFFFFF"/>
+            </a:solidFill>
+          </a:ln>
+          <a:effectLst>
+            <a:outerShdw blurRad="203200" dist="50800" dir="5400000" algn="t" rotWithShape="0">
+              <a:srgbClr val="1A2340">
+                <a:alpha val="20000"/>
+              </a:srgbClr>
+            </a:outerShdw>
+          </a:effectLst>
+        </p:spPr>
+        <p:style>
+          <a:lnRef idx="1">
+            <a:schemeClr val="accent1"/>
+          </a:lnRef>
+          <a:fillRef idx="3">
+            <a:schemeClr val="accent1"/>
+          </a:fillRef>
+          <a:effectRef idx="2">
+            <a:schemeClr val="accent1"/>
+          </a:effectRef>
+          <a:fontRef idx="minor">
+            <a:schemeClr val="lt1"/>
+          </a:fontRef>
+        </p:style>
+        <p:txBody>
+          <a:bodyPr rtlCol="0" anchor="ctr"/>
+          <a:lstStyle/>
+          <a:p>
+            <a:pPr algn="ctr"/>
+          </a:p>
+        </p:txBody>
+      </p:sp>
+      <p:sp>
+        <p:nvSpPr>
+          <p:cNvPr id="12" name="Rounded Rectangle 11"/>
+          <p:cNvSpPr/>
+          <p:nvPr/>
+        </p:nvSpPr>
+        <p:spPr>
+          <a:xfrm>
+            <a:off x="731519" y="1508760"/>
+            <a:ext cx="10728655" cy="32004"/>
+          </a:xfrm>
+          <a:prstGeom prst="roundRect">
+            <a:avLst>
+              <a:gd name="adj" fmla="val 50000"/>
+            </a:avLst>
+          </a:prstGeom>
+          <a:solidFill>
+            <a:srgbClr val="FFFFFF">
+              <a:alpha val="85000"/>
+            </a:srgbClr>
+          </a:solidFill>
+          <a:ln>
+            <a:noFill/>
+          </a:ln>
+          <a:effectLst/>
+        </p:spPr>
+        <p:style>
+          <a:lnRef idx="1">
+            <a:schemeClr val="accent1"/>
+          </a:lnRef>
+          <a:fillRef idx="3">
+            <a:schemeClr val="accent1"/>
+          </a:fillRef>
+          <a:effectRef idx="2">
+            <a:schemeClr val="accent1"/>
+          </a:effectRef>
+          <a:fontRef idx="minor">
+            <a:schemeClr val="lt1"/>
+          </a:fontRef>
+        </p:style>
+        <p:txBody>
+          <a:bodyPr rtlCol="0" anchor="ctr"/>
+          <a:lstStyle/>
+          <a:p>
+            <a:pPr algn="ctr"/>
+          </a:p>
+        </p:txBody>
+      </p:sp>
+      <p:sp>
+        <p:nvSpPr>
+          <p:cNvPr id="13" name="TextBox 12"/>
           <p:cNvSpPr txBox="1"/>
           <p:nvPr/>
         </p:nvSpPr>
@@ -10598,7 +11430,7 @@
       </p:sp>
       <p:sp>
         <p:nvSpPr>
-          <p:cNvPr id="12" name="Rounded Rectangle 11"/>
+          <p:cNvPr id="14" name="Rounded Rectangle 13"/>
           <p:cNvSpPr/>
           <p:nvPr/>
         </p:nvSpPr>
@@ -10654,7 +11486,7 @@
       </p:sp>
       <p:sp>
         <p:nvSpPr>
-          <p:cNvPr id="13" name="Oval 12"/>
+          <p:cNvPr id="15" name="Oval 14"/>
           <p:cNvSpPr/>
           <p:nvPr/>
         </p:nvSpPr>
@@ -10707,7 +11539,7 @@
       </p:sp>
       <p:sp>
         <p:nvSpPr>
-          <p:cNvPr id="14" name="TextBox 13"/>
+          <p:cNvPr id="16" name="TextBox 15"/>
           <p:cNvSpPr txBox="1"/>
           <p:nvPr/>
         </p:nvSpPr>
@@ -10741,7 +11573,7 @@
       </p:sp>
       <p:sp>
         <p:nvSpPr>
-          <p:cNvPr id="15" name="Rounded Rectangle 14"/>
+          <p:cNvPr id="17" name="Rounded Rectangle 16"/>
           <p:cNvSpPr/>
           <p:nvPr/>
         </p:nvSpPr>
@@ -10797,7 +11629,7 @@
       </p:sp>
       <p:sp>
         <p:nvSpPr>
-          <p:cNvPr id="16" name="Oval 15"/>
+          <p:cNvPr id="18" name="Oval 17"/>
           <p:cNvSpPr/>
           <p:nvPr/>
         </p:nvSpPr>
@@ -10850,7 +11682,7 @@
       </p:sp>
       <p:sp>
         <p:nvSpPr>
-          <p:cNvPr id="17" name="TextBox 16"/>
+          <p:cNvPr id="19" name="TextBox 18"/>
           <p:cNvSpPr txBox="1"/>
           <p:nvPr/>
         </p:nvSpPr>
@@ -10884,7 +11716,7 @@
       </p:sp>
       <p:sp>
         <p:nvSpPr>
-          <p:cNvPr id="18" name="Rounded Rectangle 17"/>
+          <p:cNvPr id="20" name="Rounded Rectangle 19"/>
           <p:cNvSpPr/>
           <p:nvPr/>
         </p:nvSpPr>
@@ -10940,7 +11772,7 @@
       </p:sp>
       <p:sp>
         <p:nvSpPr>
-          <p:cNvPr id="19" name="Oval 18"/>
+          <p:cNvPr id="21" name="Oval 20"/>
           <p:cNvSpPr/>
           <p:nvPr/>
         </p:nvSpPr>
@@ -10993,7 +11825,7 @@
       </p:sp>
       <p:sp>
         <p:nvSpPr>
-          <p:cNvPr id="20" name="TextBox 19"/>
+          <p:cNvPr id="22" name="TextBox 21"/>
           <p:cNvSpPr txBox="1"/>
           <p:nvPr/>
         </p:nvSpPr>
@@ -11027,7 +11859,7 @@
       </p:sp>
       <p:sp>
         <p:nvSpPr>
-          <p:cNvPr id="21" name="Rounded Rectangle 20"/>
+          <p:cNvPr id="23" name="Rounded Rectangle 22"/>
           <p:cNvSpPr/>
           <p:nvPr/>
         </p:nvSpPr>
@@ -11083,7 +11915,7 @@
       </p:sp>
       <p:sp>
         <p:nvSpPr>
-          <p:cNvPr id="22" name="Oval 21"/>
+          <p:cNvPr id="24" name="Oval 23"/>
           <p:cNvSpPr/>
           <p:nvPr/>
         </p:nvSpPr>
@@ -11136,7 +11968,7 @@
       </p:sp>
       <p:sp>
         <p:nvSpPr>
-          <p:cNvPr id="23" name="TextBox 22"/>
+          <p:cNvPr id="25" name="TextBox 24"/>
           <p:cNvSpPr txBox="1"/>
           <p:nvPr/>
         </p:nvSpPr>
@@ -11551,7 +12383,111 @@
       </p:pic>
       <p:sp>
         <p:nvSpPr>
-          <p:cNvPr id="11" name="TextBox 10"/>
+          <p:cNvPr id="11" name="Rounded Rectangle 10"/>
+          <p:cNvSpPr/>
+          <p:nvPr/>
+        </p:nvSpPr>
+        <p:spPr>
+          <a:xfrm>
+            <a:off x="411479" y="1444752"/>
+            <a:ext cx="11368735" cy="4800600"/>
+          </a:xfrm>
+          <a:prstGeom prst="roundRect">
+            <a:avLst>
+              <a:gd name="adj" fmla="val 4000"/>
+            </a:avLst>
+          </a:prstGeom>
+          <a:solidFill>
+            <a:srgbClr val="FFFFFF">
+              <a:alpha val="84000"/>
+            </a:srgbClr>
+          </a:solidFill>
+          <a:ln w="19050">
+            <a:solidFill>
+              <a:srgbClr val="FFFFFF"/>
+            </a:solidFill>
+          </a:ln>
+          <a:effectLst>
+            <a:outerShdw blurRad="203200" dist="50800" dir="5400000" algn="t" rotWithShape="0">
+              <a:srgbClr val="1A2340">
+                <a:alpha val="20000"/>
+              </a:srgbClr>
+            </a:outerShdw>
+          </a:effectLst>
+        </p:spPr>
+        <p:style>
+          <a:lnRef idx="1">
+            <a:schemeClr val="accent1"/>
+          </a:lnRef>
+          <a:fillRef idx="3">
+            <a:schemeClr val="accent1"/>
+          </a:fillRef>
+          <a:effectRef idx="2">
+            <a:schemeClr val="accent1"/>
+          </a:effectRef>
+          <a:fontRef idx="minor">
+            <a:schemeClr val="lt1"/>
+          </a:fontRef>
+        </p:style>
+        <p:txBody>
+          <a:bodyPr rtlCol="0" anchor="ctr"/>
+          <a:lstStyle/>
+          <a:p>
+            <a:pPr algn="ctr"/>
+          </a:p>
+        </p:txBody>
+      </p:sp>
+      <p:sp>
+        <p:nvSpPr>
+          <p:cNvPr id="12" name="Rounded Rectangle 11"/>
+          <p:cNvSpPr/>
+          <p:nvPr/>
+        </p:nvSpPr>
+        <p:spPr>
+          <a:xfrm>
+            <a:off x="731519" y="1508760"/>
+            <a:ext cx="10728655" cy="32004"/>
+          </a:xfrm>
+          <a:prstGeom prst="roundRect">
+            <a:avLst>
+              <a:gd name="adj" fmla="val 50000"/>
+            </a:avLst>
+          </a:prstGeom>
+          <a:solidFill>
+            <a:srgbClr val="FFFFFF">
+              <a:alpha val="85000"/>
+            </a:srgbClr>
+          </a:solidFill>
+          <a:ln>
+            <a:noFill/>
+          </a:ln>
+          <a:effectLst/>
+        </p:spPr>
+        <p:style>
+          <a:lnRef idx="1">
+            <a:schemeClr val="accent1"/>
+          </a:lnRef>
+          <a:fillRef idx="3">
+            <a:schemeClr val="accent1"/>
+          </a:fillRef>
+          <a:effectRef idx="2">
+            <a:schemeClr val="accent1"/>
+          </a:effectRef>
+          <a:fontRef idx="minor">
+            <a:schemeClr val="lt1"/>
+          </a:fontRef>
+        </p:style>
+        <p:txBody>
+          <a:bodyPr rtlCol="0" anchor="ctr"/>
+          <a:lstStyle/>
+          <a:p>
+            <a:pPr algn="ctr"/>
+          </a:p>
+        </p:txBody>
+      </p:sp>
+      <p:sp>
+        <p:nvSpPr>
+          <p:cNvPr id="13" name="TextBox 12"/>
           <p:cNvSpPr txBox="1"/>
           <p:nvPr/>
         </p:nvSpPr>
@@ -11585,7 +12521,7 @@
       </p:sp>
       <p:sp>
         <p:nvSpPr>
-          <p:cNvPr id="12" name="Rounded Rectangle 11"/>
+          <p:cNvPr id="14" name="Rounded Rectangle 13"/>
           <p:cNvSpPr/>
           <p:nvPr/>
         </p:nvSpPr>
@@ -11641,7 +12577,7 @@
       </p:sp>
       <p:sp>
         <p:nvSpPr>
-          <p:cNvPr id="13" name="Oval 12"/>
+          <p:cNvPr id="15" name="Oval 14"/>
           <p:cNvSpPr/>
           <p:nvPr/>
         </p:nvSpPr>
@@ -11694,7 +12630,7 @@
       </p:sp>
       <p:sp>
         <p:nvSpPr>
-          <p:cNvPr id="14" name="TextBox 13"/>
+          <p:cNvPr id="16" name="TextBox 15"/>
           <p:cNvSpPr txBox="1"/>
           <p:nvPr/>
         </p:nvSpPr>
@@ -11728,7 +12664,7 @@
       </p:sp>
       <p:sp>
         <p:nvSpPr>
-          <p:cNvPr id="15" name="Rounded Rectangle 14"/>
+          <p:cNvPr id="17" name="Rounded Rectangle 16"/>
           <p:cNvSpPr/>
           <p:nvPr/>
         </p:nvSpPr>
@@ -11784,7 +12720,7 @@
       </p:sp>
       <p:sp>
         <p:nvSpPr>
-          <p:cNvPr id="16" name="Oval 15"/>
+          <p:cNvPr id="18" name="Oval 17"/>
           <p:cNvSpPr/>
           <p:nvPr/>
         </p:nvSpPr>
@@ -11837,7 +12773,7 @@
       </p:sp>
       <p:sp>
         <p:nvSpPr>
-          <p:cNvPr id="17" name="TextBox 16"/>
+          <p:cNvPr id="19" name="TextBox 18"/>
           <p:cNvSpPr txBox="1"/>
           <p:nvPr/>
         </p:nvSpPr>
@@ -11871,7 +12807,7 @@
       </p:sp>
       <p:sp>
         <p:nvSpPr>
-          <p:cNvPr id="18" name="Rounded Rectangle 17"/>
+          <p:cNvPr id="20" name="Rounded Rectangle 19"/>
           <p:cNvSpPr/>
           <p:nvPr/>
         </p:nvSpPr>
@@ -11927,7 +12863,7 @@
       </p:sp>
       <p:sp>
         <p:nvSpPr>
-          <p:cNvPr id="19" name="Oval 18"/>
+          <p:cNvPr id="21" name="Oval 20"/>
           <p:cNvSpPr/>
           <p:nvPr/>
         </p:nvSpPr>
@@ -11980,7 +12916,7 @@
       </p:sp>
       <p:sp>
         <p:nvSpPr>
-          <p:cNvPr id="20" name="TextBox 19"/>
+          <p:cNvPr id="22" name="TextBox 21"/>
           <p:cNvSpPr txBox="1"/>
           <p:nvPr/>
         </p:nvSpPr>
@@ -12014,7 +12950,7 @@
       </p:sp>
       <p:sp>
         <p:nvSpPr>
-          <p:cNvPr id="21" name="Rounded Rectangle 20"/>
+          <p:cNvPr id="23" name="Rounded Rectangle 22"/>
           <p:cNvSpPr/>
           <p:nvPr/>
         </p:nvSpPr>
@@ -12073,7 +13009,7 @@
       </p:sp>
       <p:sp>
         <p:nvSpPr>
-          <p:cNvPr id="22" name="Oval 21"/>
+          <p:cNvPr id="24" name="Oval 23"/>
           <p:cNvSpPr/>
           <p:nvPr/>
         </p:nvSpPr>
@@ -12126,7 +13062,7 @@
       </p:sp>
       <p:sp>
         <p:nvSpPr>
-          <p:cNvPr id="23" name="TextBox 22"/>
+          <p:cNvPr id="25" name="TextBox 24"/>
           <p:cNvSpPr txBox="1"/>
           <p:nvPr/>
         </p:nvSpPr>
@@ -12160,7 +13096,7 @@
       </p:sp>
       <p:sp>
         <p:nvSpPr>
-          <p:cNvPr id="24" name="TextBox 23"/>
+          <p:cNvPr id="26" name="TextBox 25"/>
           <p:cNvSpPr txBox="1"/>
           <p:nvPr/>
         </p:nvSpPr>
@@ -12584,7 +13520,111 @@
       </p:pic>
       <p:sp>
         <p:nvSpPr>
-          <p:cNvPr id="11" name="TextBox 10"/>
+          <p:cNvPr id="11" name="Rounded Rectangle 10"/>
+          <p:cNvSpPr/>
+          <p:nvPr/>
+        </p:nvSpPr>
+        <p:spPr>
+          <a:xfrm>
+            <a:off x="411479" y="1444752"/>
+            <a:ext cx="11368735" cy="4800600"/>
+          </a:xfrm>
+          <a:prstGeom prst="roundRect">
+            <a:avLst>
+              <a:gd name="adj" fmla="val 4000"/>
+            </a:avLst>
+          </a:prstGeom>
+          <a:solidFill>
+            <a:srgbClr val="FFFFFF">
+              <a:alpha val="84000"/>
+            </a:srgbClr>
+          </a:solidFill>
+          <a:ln w="19050">
+            <a:solidFill>
+              <a:srgbClr val="FFFFFF"/>
+            </a:solidFill>
+          </a:ln>
+          <a:effectLst>
+            <a:outerShdw blurRad="203200" dist="50800" dir="5400000" algn="t" rotWithShape="0">
+              <a:srgbClr val="1A2340">
+                <a:alpha val="20000"/>
+              </a:srgbClr>
+            </a:outerShdw>
+          </a:effectLst>
+        </p:spPr>
+        <p:style>
+          <a:lnRef idx="1">
+            <a:schemeClr val="accent1"/>
+          </a:lnRef>
+          <a:fillRef idx="3">
+            <a:schemeClr val="accent1"/>
+          </a:fillRef>
+          <a:effectRef idx="2">
+            <a:schemeClr val="accent1"/>
+          </a:effectRef>
+          <a:fontRef idx="minor">
+            <a:schemeClr val="lt1"/>
+          </a:fontRef>
+        </p:style>
+        <p:txBody>
+          <a:bodyPr rtlCol="0" anchor="ctr"/>
+          <a:lstStyle/>
+          <a:p>
+            <a:pPr algn="ctr"/>
+          </a:p>
+        </p:txBody>
+      </p:sp>
+      <p:sp>
+        <p:nvSpPr>
+          <p:cNvPr id="12" name="Rounded Rectangle 11"/>
+          <p:cNvSpPr/>
+          <p:nvPr/>
+        </p:nvSpPr>
+        <p:spPr>
+          <a:xfrm>
+            <a:off x="731519" y="1508760"/>
+            <a:ext cx="10728655" cy="32004"/>
+          </a:xfrm>
+          <a:prstGeom prst="roundRect">
+            <a:avLst>
+              <a:gd name="adj" fmla="val 50000"/>
+            </a:avLst>
+          </a:prstGeom>
+          <a:solidFill>
+            <a:srgbClr val="FFFFFF">
+              <a:alpha val="85000"/>
+            </a:srgbClr>
+          </a:solidFill>
+          <a:ln>
+            <a:noFill/>
+          </a:ln>
+          <a:effectLst/>
+        </p:spPr>
+        <p:style>
+          <a:lnRef idx="1">
+            <a:schemeClr val="accent1"/>
+          </a:lnRef>
+          <a:fillRef idx="3">
+            <a:schemeClr val="accent1"/>
+          </a:fillRef>
+          <a:effectRef idx="2">
+            <a:schemeClr val="accent1"/>
+          </a:effectRef>
+          <a:fontRef idx="minor">
+            <a:schemeClr val="lt1"/>
+          </a:fontRef>
+        </p:style>
+        <p:txBody>
+          <a:bodyPr rtlCol="0" anchor="ctr"/>
+          <a:lstStyle/>
+          <a:p>
+            <a:pPr algn="ctr"/>
+          </a:p>
+        </p:txBody>
+      </p:sp>
+      <p:sp>
+        <p:nvSpPr>
+          <p:cNvPr id="13" name="TextBox 12"/>
           <p:cNvSpPr txBox="1"/>
           <p:nvPr/>
         </p:nvSpPr>
@@ -12618,7 +13658,7 @@
       </p:sp>
       <p:sp>
         <p:nvSpPr>
-          <p:cNvPr id="12" name="Rounded Rectangle 11"/>
+          <p:cNvPr id="14" name="Rounded Rectangle 13"/>
           <p:cNvSpPr/>
           <p:nvPr/>
         </p:nvSpPr>
@@ -12674,7 +13714,7 @@
       </p:sp>
       <p:sp>
         <p:nvSpPr>
-          <p:cNvPr id="13" name="Oval 12"/>
+          <p:cNvPr id="15" name="Oval 14"/>
           <p:cNvSpPr/>
           <p:nvPr/>
         </p:nvSpPr>
@@ -12727,7 +13767,7 @@
       </p:sp>
       <p:sp>
         <p:nvSpPr>
-          <p:cNvPr id="14" name="TextBox 13"/>
+          <p:cNvPr id="16" name="TextBox 15"/>
           <p:cNvSpPr txBox="1"/>
           <p:nvPr/>
         </p:nvSpPr>
@@ -12761,7 +13801,7 @@
       </p:sp>
       <p:sp>
         <p:nvSpPr>
-          <p:cNvPr id="15" name="Rounded Rectangle 14"/>
+          <p:cNvPr id="17" name="Rounded Rectangle 16"/>
           <p:cNvSpPr/>
           <p:nvPr/>
         </p:nvSpPr>
@@ -12817,7 +13857,7 @@
       </p:sp>
       <p:sp>
         <p:nvSpPr>
-          <p:cNvPr id="16" name="Oval 15"/>
+          <p:cNvPr id="18" name="Oval 17"/>
           <p:cNvSpPr/>
           <p:nvPr/>
         </p:nvSpPr>
@@ -12870,7 +13910,7 @@
       </p:sp>
       <p:sp>
         <p:nvSpPr>
-          <p:cNvPr id="17" name="TextBox 16"/>
+          <p:cNvPr id="19" name="TextBox 18"/>
           <p:cNvSpPr txBox="1"/>
           <p:nvPr/>
         </p:nvSpPr>
@@ -12904,7 +13944,7 @@
       </p:sp>
       <p:sp>
         <p:nvSpPr>
-          <p:cNvPr id="18" name="Rounded Rectangle 17"/>
+          <p:cNvPr id="20" name="Rounded Rectangle 19"/>
           <p:cNvSpPr/>
           <p:nvPr/>
         </p:nvSpPr>
@@ -12960,7 +14000,7 @@
       </p:sp>
       <p:sp>
         <p:nvSpPr>
-          <p:cNvPr id="19" name="Oval 18"/>
+          <p:cNvPr id="21" name="Oval 20"/>
           <p:cNvSpPr/>
           <p:nvPr/>
         </p:nvSpPr>
@@ -13013,7 +14053,7 @@
       </p:sp>
       <p:sp>
         <p:nvSpPr>
-          <p:cNvPr id="20" name="TextBox 19"/>
+          <p:cNvPr id="22" name="TextBox 21"/>
           <p:cNvSpPr txBox="1"/>
           <p:nvPr/>
         </p:nvSpPr>
@@ -13047,7 +14087,7 @@
       </p:sp>
       <p:sp>
         <p:nvSpPr>
-          <p:cNvPr id="21" name="Rounded Rectangle 20"/>
+          <p:cNvPr id="23" name="Rounded Rectangle 22"/>
           <p:cNvSpPr/>
           <p:nvPr/>
         </p:nvSpPr>
@@ -13103,7 +14143,7 @@
       </p:sp>
       <p:sp>
         <p:nvSpPr>
-          <p:cNvPr id="22" name="Oval 21"/>
+          <p:cNvPr id="24" name="Oval 23"/>
           <p:cNvSpPr/>
           <p:nvPr/>
         </p:nvSpPr>
@@ -13156,7 +14196,7 @@
       </p:sp>
       <p:sp>
         <p:nvSpPr>
-          <p:cNvPr id="23" name="TextBox 22"/>
+          <p:cNvPr id="25" name="TextBox 24"/>
           <p:cNvSpPr txBox="1"/>
           <p:nvPr/>
         </p:nvSpPr>
@@ -13571,7 +14611,111 @@
       </p:pic>
       <p:sp>
         <p:nvSpPr>
-          <p:cNvPr id="11" name="Oval 10"/>
+          <p:cNvPr id="11" name="Rounded Rectangle 10"/>
+          <p:cNvSpPr/>
+          <p:nvPr/>
+        </p:nvSpPr>
+        <p:spPr>
+          <a:xfrm>
+            <a:off x="411479" y="1444752"/>
+            <a:ext cx="11368735" cy="4800600"/>
+          </a:xfrm>
+          <a:prstGeom prst="roundRect">
+            <a:avLst>
+              <a:gd name="adj" fmla="val 4000"/>
+            </a:avLst>
+          </a:prstGeom>
+          <a:solidFill>
+            <a:srgbClr val="FFFFFF">
+              <a:alpha val="84000"/>
+            </a:srgbClr>
+          </a:solidFill>
+          <a:ln w="19050">
+            <a:solidFill>
+              <a:srgbClr val="FFFFFF"/>
+            </a:solidFill>
+          </a:ln>
+          <a:effectLst>
+            <a:outerShdw blurRad="203200" dist="50800" dir="5400000" algn="t" rotWithShape="0">
+              <a:srgbClr val="1A2340">
+                <a:alpha val="20000"/>
+              </a:srgbClr>
+            </a:outerShdw>
+          </a:effectLst>
+        </p:spPr>
+        <p:style>
+          <a:lnRef idx="1">
+            <a:schemeClr val="accent1"/>
+          </a:lnRef>
+          <a:fillRef idx="3">
+            <a:schemeClr val="accent1"/>
+          </a:fillRef>
+          <a:effectRef idx="2">
+            <a:schemeClr val="accent1"/>
+          </a:effectRef>
+          <a:fontRef idx="minor">
+            <a:schemeClr val="lt1"/>
+          </a:fontRef>
+        </p:style>
+        <p:txBody>
+          <a:bodyPr rtlCol="0" anchor="ctr"/>
+          <a:lstStyle/>
+          <a:p>
+            <a:pPr algn="ctr"/>
+          </a:p>
+        </p:txBody>
+      </p:sp>
+      <p:sp>
+        <p:nvSpPr>
+          <p:cNvPr id="12" name="Rounded Rectangle 11"/>
+          <p:cNvSpPr/>
+          <p:nvPr/>
+        </p:nvSpPr>
+        <p:spPr>
+          <a:xfrm>
+            <a:off x="731519" y="1508760"/>
+            <a:ext cx="10728655" cy="32004"/>
+          </a:xfrm>
+          <a:prstGeom prst="roundRect">
+            <a:avLst>
+              <a:gd name="adj" fmla="val 50000"/>
+            </a:avLst>
+          </a:prstGeom>
+          <a:solidFill>
+            <a:srgbClr val="FFFFFF">
+              <a:alpha val="85000"/>
+            </a:srgbClr>
+          </a:solidFill>
+          <a:ln>
+            <a:noFill/>
+          </a:ln>
+          <a:effectLst/>
+        </p:spPr>
+        <p:style>
+          <a:lnRef idx="1">
+            <a:schemeClr val="accent1"/>
+          </a:lnRef>
+          <a:fillRef idx="3">
+            <a:schemeClr val="accent1"/>
+          </a:fillRef>
+          <a:effectRef idx="2">
+            <a:schemeClr val="accent1"/>
+          </a:effectRef>
+          <a:fontRef idx="minor">
+            <a:schemeClr val="lt1"/>
+          </a:fontRef>
+        </p:style>
+        <p:txBody>
+          <a:bodyPr rtlCol="0" anchor="ctr"/>
+          <a:lstStyle/>
+          <a:p>
+            <a:pPr algn="ctr"/>
+          </a:p>
+        </p:txBody>
+      </p:sp>
+      <p:sp>
+        <p:nvSpPr>
+          <p:cNvPr id="13" name="Oval 12"/>
           <p:cNvSpPr/>
           <p:nvPr/>
         </p:nvSpPr>
@@ -13624,7 +14768,7 @@
       </p:sp>
       <p:sp>
         <p:nvSpPr>
-          <p:cNvPr id="12" name="TextBox 11"/>
+          <p:cNvPr id="14" name="TextBox 13"/>
           <p:cNvSpPr txBox="1"/>
           <p:nvPr/>
         </p:nvSpPr>
@@ -13658,7 +14802,7 @@
       </p:sp>
       <p:sp>
         <p:nvSpPr>
-          <p:cNvPr id="13" name="Oval 12"/>
+          <p:cNvPr id="15" name="Oval 14"/>
           <p:cNvSpPr/>
           <p:nvPr/>
         </p:nvSpPr>
@@ -13711,7 +14855,7 @@
       </p:sp>
       <p:sp>
         <p:nvSpPr>
-          <p:cNvPr id="14" name="TextBox 13"/>
+          <p:cNvPr id="16" name="TextBox 15"/>
           <p:cNvSpPr txBox="1"/>
           <p:nvPr/>
         </p:nvSpPr>
@@ -13745,7 +14889,7 @@
       </p:sp>
       <p:sp>
         <p:nvSpPr>
-          <p:cNvPr id="15" name="Oval 14"/>
+          <p:cNvPr id="17" name="Oval 16"/>
           <p:cNvSpPr/>
           <p:nvPr/>
         </p:nvSpPr>
@@ -13798,7 +14942,7 @@
       </p:sp>
       <p:sp>
         <p:nvSpPr>
-          <p:cNvPr id="16" name="TextBox 15"/>
+          <p:cNvPr id="18" name="TextBox 17"/>
           <p:cNvSpPr txBox="1"/>
           <p:nvPr/>
         </p:nvSpPr>
@@ -13832,7 +14976,7 @@
       </p:sp>
       <p:sp>
         <p:nvSpPr>
-          <p:cNvPr id="17" name="Oval 16"/>
+          <p:cNvPr id="19" name="Oval 18"/>
           <p:cNvSpPr/>
           <p:nvPr/>
         </p:nvSpPr>
@@ -13885,7 +15029,7 @@
       </p:sp>
       <p:sp>
         <p:nvSpPr>
-          <p:cNvPr id="18" name="TextBox 17"/>
+          <p:cNvPr id="20" name="TextBox 19"/>
           <p:cNvSpPr txBox="1"/>
           <p:nvPr/>
         </p:nvSpPr>
@@ -13919,7 +15063,7 @@
       </p:sp>
       <p:sp>
         <p:nvSpPr>
-          <p:cNvPr id="19" name="Oval 18"/>
+          <p:cNvPr id="21" name="Oval 20"/>
           <p:cNvSpPr/>
           <p:nvPr/>
         </p:nvSpPr>
@@ -13972,7 +15116,7 @@
       </p:sp>
       <p:sp>
         <p:nvSpPr>
-          <p:cNvPr id="20" name="TextBox 19"/>
+          <p:cNvPr id="22" name="TextBox 21"/>
           <p:cNvSpPr txBox="1"/>
           <p:nvPr/>
         </p:nvSpPr>
@@ -14006,7 +15150,7 @@
       </p:sp>
       <p:sp>
         <p:nvSpPr>
-          <p:cNvPr id="21" name="Rounded Rectangle 20"/>
+          <p:cNvPr id="23" name="Rounded Rectangle 22"/>
           <p:cNvSpPr/>
           <p:nvPr/>
         </p:nvSpPr>
@@ -14062,7 +15206,7 @@
       </p:sp>
       <p:sp>
         <p:nvSpPr>
-          <p:cNvPr id="22" name="Rounded Rectangle 21"/>
+          <p:cNvPr id="24" name="Rounded Rectangle 23"/>
           <p:cNvSpPr/>
           <p:nvPr/>
         </p:nvSpPr>
@@ -14110,7 +15254,7 @@
       </p:sp>
       <p:sp>
         <p:nvSpPr>
-          <p:cNvPr id="23" name="TextBox 22"/>
+          <p:cNvPr id="25" name="TextBox 24"/>
           <p:cNvSpPr txBox="1"/>
           <p:nvPr/>
         </p:nvSpPr>
@@ -14568,7 +15712,111 @@
       </p:pic>
       <p:sp>
         <p:nvSpPr>
-          <p:cNvPr id="11" name="TextBox 10"/>
+          <p:cNvPr id="11" name="Rounded Rectangle 10"/>
+          <p:cNvSpPr/>
+          <p:nvPr/>
+        </p:nvSpPr>
+        <p:spPr>
+          <a:xfrm>
+            <a:off x="411479" y="1444752"/>
+            <a:ext cx="11368735" cy="4800600"/>
+          </a:xfrm>
+          <a:prstGeom prst="roundRect">
+            <a:avLst>
+              <a:gd name="adj" fmla="val 4000"/>
+            </a:avLst>
+          </a:prstGeom>
+          <a:solidFill>
+            <a:srgbClr val="FFFFFF">
+              <a:alpha val="84000"/>
+            </a:srgbClr>
+          </a:solidFill>
+          <a:ln w="19050">
+            <a:solidFill>
+              <a:srgbClr val="FFFFFF"/>
+            </a:solidFill>
+          </a:ln>
+          <a:effectLst>
+            <a:outerShdw blurRad="203200" dist="50800" dir="5400000" algn="t" rotWithShape="0">
+              <a:srgbClr val="1A2340">
+                <a:alpha val="20000"/>
+              </a:srgbClr>
+            </a:outerShdw>
+          </a:effectLst>
+        </p:spPr>
+        <p:style>
+          <a:lnRef idx="1">
+            <a:schemeClr val="accent1"/>
+          </a:lnRef>
+          <a:fillRef idx="3">
+            <a:schemeClr val="accent1"/>
+          </a:fillRef>
+          <a:effectRef idx="2">
+            <a:schemeClr val="accent1"/>
+          </a:effectRef>
+          <a:fontRef idx="minor">
+            <a:schemeClr val="lt1"/>
+          </a:fontRef>
+        </p:style>
+        <p:txBody>
+          <a:bodyPr rtlCol="0" anchor="ctr"/>
+          <a:lstStyle/>
+          <a:p>
+            <a:pPr algn="ctr"/>
+          </a:p>
+        </p:txBody>
+      </p:sp>
+      <p:sp>
+        <p:nvSpPr>
+          <p:cNvPr id="12" name="Rounded Rectangle 11"/>
+          <p:cNvSpPr/>
+          <p:nvPr/>
+        </p:nvSpPr>
+        <p:spPr>
+          <a:xfrm>
+            <a:off x="731519" y="1508760"/>
+            <a:ext cx="10728655" cy="32004"/>
+          </a:xfrm>
+          <a:prstGeom prst="roundRect">
+            <a:avLst>
+              <a:gd name="adj" fmla="val 50000"/>
+            </a:avLst>
+          </a:prstGeom>
+          <a:solidFill>
+            <a:srgbClr val="FFFFFF">
+              <a:alpha val="85000"/>
+            </a:srgbClr>
+          </a:solidFill>
+          <a:ln>
+            <a:noFill/>
+          </a:ln>
+          <a:effectLst/>
+        </p:spPr>
+        <p:style>
+          <a:lnRef idx="1">
+            <a:schemeClr val="accent1"/>
+          </a:lnRef>
+          <a:fillRef idx="3">
+            <a:schemeClr val="accent1"/>
+          </a:fillRef>
+          <a:effectRef idx="2">
+            <a:schemeClr val="accent1"/>
+          </a:effectRef>
+          <a:fontRef idx="minor">
+            <a:schemeClr val="lt1"/>
+          </a:fontRef>
+        </p:style>
+        <p:txBody>
+          <a:bodyPr rtlCol="0" anchor="ctr"/>
+          <a:lstStyle/>
+          <a:p>
+            <a:pPr algn="ctr"/>
+          </a:p>
+        </p:txBody>
+      </p:sp>
+      <p:sp>
+        <p:nvSpPr>
+          <p:cNvPr id="13" name="TextBox 12"/>
           <p:cNvSpPr txBox="1"/>
           <p:nvPr/>
         </p:nvSpPr>
@@ -14602,7 +15850,7 @@
       </p:sp>
       <p:sp>
         <p:nvSpPr>
-          <p:cNvPr id="12" name="Rounded Rectangle 11"/>
+          <p:cNvPr id="14" name="Rounded Rectangle 13"/>
           <p:cNvSpPr/>
           <p:nvPr/>
         </p:nvSpPr>
@@ -14658,7 +15906,7 @@
       </p:sp>
       <p:sp>
         <p:nvSpPr>
-          <p:cNvPr id="13" name="Oval 12"/>
+          <p:cNvPr id="15" name="Oval 14"/>
           <p:cNvSpPr/>
           <p:nvPr/>
         </p:nvSpPr>
@@ -14711,7 +15959,7 @@
       </p:sp>
       <p:sp>
         <p:nvSpPr>
-          <p:cNvPr id="14" name="TextBox 13"/>
+          <p:cNvPr id="16" name="TextBox 15"/>
           <p:cNvSpPr txBox="1"/>
           <p:nvPr/>
         </p:nvSpPr>
@@ -14745,7 +15993,7 @@
       </p:sp>
       <p:sp>
         <p:nvSpPr>
-          <p:cNvPr id="15" name="Rounded Rectangle 14"/>
+          <p:cNvPr id="17" name="Rounded Rectangle 16"/>
           <p:cNvSpPr/>
           <p:nvPr/>
         </p:nvSpPr>
@@ -14804,7 +16052,7 @@
       </p:sp>
       <p:sp>
         <p:nvSpPr>
-          <p:cNvPr id="16" name="Oval 15"/>
+          <p:cNvPr id="18" name="Oval 17"/>
           <p:cNvSpPr/>
           <p:nvPr/>
         </p:nvSpPr>
@@ -14857,7 +16105,7 @@
       </p:sp>
       <p:sp>
         <p:nvSpPr>
-          <p:cNvPr id="17" name="TextBox 16"/>
+          <p:cNvPr id="19" name="TextBox 18"/>
           <p:cNvSpPr txBox="1"/>
           <p:nvPr/>
         </p:nvSpPr>
@@ -14891,7 +16139,7 @@
       </p:sp>
       <p:sp>
         <p:nvSpPr>
-          <p:cNvPr id="18" name="Rounded Rectangle 17"/>
+          <p:cNvPr id="20" name="Rounded Rectangle 19"/>
           <p:cNvSpPr/>
           <p:nvPr/>
         </p:nvSpPr>
@@ -14947,7 +16195,7 @@
       </p:sp>
       <p:sp>
         <p:nvSpPr>
-          <p:cNvPr id="19" name="Oval 18"/>
+          <p:cNvPr id="21" name="Oval 20"/>
           <p:cNvSpPr/>
           <p:nvPr/>
         </p:nvSpPr>
@@ -15000,7 +16248,7 @@
       </p:sp>
       <p:sp>
         <p:nvSpPr>
-          <p:cNvPr id="20" name="TextBox 19"/>
+          <p:cNvPr id="22" name="TextBox 21"/>
           <p:cNvSpPr txBox="1"/>
           <p:nvPr/>
         </p:nvSpPr>
@@ -15034,7 +16282,7 @@
       </p:sp>
       <p:sp>
         <p:nvSpPr>
-          <p:cNvPr id="21" name="Rounded Rectangle 20"/>
+          <p:cNvPr id="23" name="Rounded Rectangle 22"/>
           <p:cNvSpPr/>
           <p:nvPr/>
         </p:nvSpPr>
@@ -15090,7 +16338,7 @@
       </p:sp>
       <p:sp>
         <p:nvSpPr>
-          <p:cNvPr id="22" name="Oval 21"/>
+          <p:cNvPr id="24" name="Oval 23"/>
           <p:cNvSpPr/>
           <p:nvPr/>
         </p:nvSpPr>
@@ -15143,7 +16391,7 @@
       </p:sp>
       <p:sp>
         <p:nvSpPr>
-          <p:cNvPr id="23" name="TextBox 22"/>
+          <p:cNvPr id="25" name="TextBox 24"/>
           <p:cNvSpPr txBox="1"/>
           <p:nvPr/>
         </p:nvSpPr>
@@ -15177,7 +16425,7 @@
       </p:sp>
       <p:sp>
         <p:nvSpPr>
-          <p:cNvPr id="24" name="TextBox 23"/>
+          <p:cNvPr id="26" name="TextBox 25"/>
           <p:cNvSpPr txBox="1"/>
           <p:nvPr/>
         </p:nvSpPr>
@@ -15601,7 +16849,111 @@
       </p:pic>
       <p:sp>
         <p:nvSpPr>
-          <p:cNvPr id="11" name="TextBox 10"/>
+          <p:cNvPr id="11" name="Rounded Rectangle 10"/>
+          <p:cNvSpPr/>
+          <p:nvPr/>
+        </p:nvSpPr>
+        <p:spPr>
+          <a:xfrm>
+            <a:off x="411479" y="1444752"/>
+            <a:ext cx="11368735" cy="4800600"/>
+          </a:xfrm>
+          <a:prstGeom prst="roundRect">
+            <a:avLst>
+              <a:gd name="adj" fmla="val 4000"/>
+            </a:avLst>
+          </a:prstGeom>
+          <a:solidFill>
+            <a:srgbClr val="FFFFFF">
+              <a:alpha val="84000"/>
+            </a:srgbClr>
+          </a:solidFill>
+          <a:ln w="19050">
+            <a:solidFill>
+              <a:srgbClr val="FFFFFF"/>
+            </a:solidFill>
+          </a:ln>
+          <a:effectLst>
+            <a:outerShdw blurRad="203200" dist="50800" dir="5400000" algn="t" rotWithShape="0">
+              <a:srgbClr val="1A2340">
+                <a:alpha val="20000"/>
+              </a:srgbClr>
+            </a:outerShdw>
+          </a:effectLst>
+        </p:spPr>
+        <p:style>
+          <a:lnRef idx="1">
+            <a:schemeClr val="accent1"/>
+          </a:lnRef>
+          <a:fillRef idx="3">
+            <a:schemeClr val="accent1"/>
+          </a:fillRef>
+          <a:effectRef idx="2">
+            <a:schemeClr val="accent1"/>
+          </a:effectRef>
+          <a:fontRef idx="minor">
+            <a:schemeClr val="lt1"/>
+          </a:fontRef>
+        </p:style>
+        <p:txBody>
+          <a:bodyPr rtlCol="0" anchor="ctr"/>
+          <a:lstStyle/>
+          <a:p>
+            <a:pPr algn="ctr"/>
+          </a:p>
+        </p:txBody>
+      </p:sp>
+      <p:sp>
+        <p:nvSpPr>
+          <p:cNvPr id="12" name="Rounded Rectangle 11"/>
+          <p:cNvSpPr/>
+          <p:nvPr/>
+        </p:nvSpPr>
+        <p:spPr>
+          <a:xfrm>
+            <a:off x="731519" y="1508760"/>
+            <a:ext cx="10728655" cy="32004"/>
+          </a:xfrm>
+          <a:prstGeom prst="roundRect">
+            <a:avLst>
+              <a:gd name="adj" fmla="val 50000"/>
+            </a:avLst>
+          </a:prstGeom>
+          <a:solidFill>
+            <a:srgbClr val="FFFFFF">
+              <a:alpha val="85000"/>
+            </a:srgbClr>
+          </a:solidFill>
+          <a:ln>
+            <a:noFill/>
+          </a:ln>
+          <a:effectLst/>
+        </p:spPr>
+        <p:style>
+          <a:lnRef idx="1">
+            <a:schemeClr val="accent1"/>
+          </a:lnRef>
+          <a:fillRef idx="3">
+            <a:schemeClr val="accent1"/>
+          </a:fillRef>
+          <a:effectRef idx="2">
+            <a:schemeClr val="accent1"/>
+          </a:effectRef>
+          <a:fontRef idx="minor">
+            <a:schemeClr val="lt1"/>
+          </a:fontRef>
+        </p:style>
+        <p:txBody>
+          <a:bodyPr rtlCol="0" anchor="ctr"/>
+          <a:lstStyle/>
+          <a:p>
+            <a:pPr algn="ctr"/>
+          </a:p>
+        </p:txBody>
+      </p:sp>
+      <p:sp>
+        <p:nvSpPr>
+          <p:cNvPr id="13" name="TextBox 12"/>
           <p:cNvSpPr txBox="1"/>
           <p:nvPr/>
         </p:nvSpPr>
@@ -15635,7 +16987,7 @@
       </p:sp>
       <p:sp>
         <p:nvSpPr>
-          <p:cNvPr id="12" name="Rounded Rectangle 11"/>
+          <p:cNvPr id="14" name="Rounded Rectangle 13"/>
           <p:cNvSpPr/>
           <p:nvPr/>
         </p:nvSpPr>
@@ -15691,7 +17043,7 @@
       </p:sp>
       <p:sp>
         <p:nvSpPr>
-          <p:cNvPr id="13" name="Oval 12"/>
+          <p:cNvPr id="15" name="Oval 14"/>
           <p:cNvSpPr/>
           <p:nvPr/>
         </p:nvSpPr>
@@ -15744,7 +17096,7 @@
       </p:sp>
       <p:sp>
         <p:nvSpPr>
-          <p:cNvPr id="14" name="TextBox 13"/>
+          <p:cNvPr id="16" name="TextBox 15"/>
           <p:cNvSpPr txBox="1"/>
           <p:nvPr/>
         </p:nvSpPr>
@@ -15778,7 +17130,7 @@
       </p:sp>
       <p:sp>
         <p:nvSpPr>
-          <p:cNvPr id="15" name="Rounded Rectangle 14"/>
+          <p:cNvPr id="17" name="Rounded Rectangle 16"/>
           <p:cNvSpPr/>
           <p:nvPr/>
         </p:nvSpPr>
@@ -15834,7 +17186,7 @@
       </p:sp>
       <p:sp>
         <p:nvSpPr>
-          <p:cNvPr id="16" name="Oval 15"/>
+          <p:cNvPr id="18" name="Oval 17"/>
           <p:cNvSpPr/>
           <p:nvPr/>
         </p:nvSpPr>
@@ -15887,7 +17239,7 @@
       </p:sp>
       <p:sp>
         <p:nvSpPr>
-          <p:cNvPr id="17" name="TextBox 16"/>
+          <p:cNvPr id="19" name="TextBox 18"/>
           <p:cNvSpPr txBox="1"/>
           <p:nvPr/>
         </p:nvSpPr>
@@ -15921,7 +17273,7 @@
       </p:sp>
       <p:sp>
         <p:nvSpPr>
-          <p:cNvPr id="18" name="Rounded Rectangle 17"/>
+          <p:cNvPr id="20" name="Rounded Rectangle 19"/>
           <p:cNvSpPr/>
           <p:nvPr/>
         </p:nvSpPr>
@@ -15977,7 +17329,7 @@
       </p:sp>
       <p:sp>
         <p:nvSpPr>
-          <p:cNvPr id="19" name="Oval 18"/>
+          <p:cNvPr id="21" name="Oval 20"/>
           <p:cNvSpPr/>
           <p:nvPr/>
         </p:nvSpPr>
@@ -16030,7 +17382,7 @@
       </p:sp>
       <p:sp>
         <p:nvSpPr>
-          <p:cNvPr id="20" name="TextBox 19"/>
+          <p:cNvPr id="22" name="TextBox 21"/>
           <p:cNvSpPr txBox="1"/>
           <p:nvPr/>
         </p:nvSpPr>
@@ -16064,7 +17416,7 @@
       </p:sp>
       <p:sp>
         <p:nvSpPr>
-          <p:cNvPr id="21" name="Rounded Rectangle 20"/>
+          <p:cNvPr id="23" name="Rounded Rectangle 22"/>
           <p:cNvSpPr/>
           <p:nvPr/>
         </p:nvSpPr>
@@ -16120,7 +17472,7 @@
       </p:sp>
       <p:sp>
         <p:nvSpPr>
-          <p:cNvPr id="22" name="Oval 21"/>
+          <p:cNvPr id="24" name="Oval 23"/>
           <p:cNvSpPr/>
           <p:nvPr/>
         </p:nvSpPr>
@@ -16173,7 +17525,7 @@
       </p:sp>
       <p:sp>
         <p:nvSpPr>
-          <p:cNvPr id="23" name="TextBox 22"/>
+          <p:cNvPr id="25" name="TextBox 24"/>
           <p:cNvSpPr txBox="1"/>
           <p:nvPr/>
         </p:nvSpPr>
@@ -16588,7 +17940,111 @@
       </p:pic>
       <p:sp>
         <p:nvSpPr>
-          <p:cNvPr id="11" name="TextBox 10"/>
+          <p:cNvPr id="11" name="Rounded Rectangle 10"/>
+          <p:cNvSpPr/>
+          <p:nvPr/>
+        </p:nvSpPr>
+        <p:spPr>
+          <a:xfrm>
+            <a:off x="411479" y="1444752"/>
+            <a:ext cx="11368735" cy="4800600"/>
+          </a:xfrm>
+          <a:prstGeom prst="roundRect">
+            <a:avLst>
+              <a:gd name="adj" fmla="val 4000"/>
+            </a:avLst>
+          </a:prstGeom>
+          <a:solidFill>
+            <a:srgbClr val="FFFFFF">
+              <a:alpha val="84000"/>
+            </a:srgbClr>
+          </a:solidFill>
+          <a:ln w="19050">
+            <a:solidFill>
+              <a:srgbClr val="FFFFFF"/>
+            </a:solidFill>
+          </a:ln>
+          <a:effectLst>
+            <a:outerShdw blurRad="203200" dist="50800" dir="5400000" algn="t" rotWithShape="0">
+              <a:srgbClr val="1A2340">
+                <a:alpha val="20000"/>
+              </a:srgbClr>
+            </a:outerShdw>
+          </a:effectLst>
+        </p:spPr>
+        <p:style>
+          <a:lnRef idx="1">
+            <a:schemeClr val="accent1"/>
+          </a:lnRef>
+          <a:fillRef idx="3">
+            <a:schemeClr val="accent1"/>
+          </a:fillRef>
+          <a:effectRef idx="2">
+            <a:schemeClr val="accent1"/>
+          </a:effectRef>
+          <a:fontRef idx="minor">
+            <a:schemeClr val="lt1"/>
+          </a:fontRef>
+        </p:style>
+        <p:txBody>
+          <a:bodyPr rtlCol="0" anchor="ctr"/>
+          <a:lstStyle/>
+          <a:p>
+            <a:pPr algn="ctr"/>
+          </a:p>
+        </p:txBody>
+      </p:sp>
+      <p:sp>
+        <p:nvSpPr>
+          <p:cNvPr id="12" name="Rounded Rectangle 11"/>
+          <p:cNvSpPr/>
+          <p:nvPr/>
+        </p:nvSpPr>
+        <p:spPr>
+          <a:xfrm>
+            <a:off x="731519" y="1508760"/>
+            <a:ext cx="10728655" cy="32004"/>
+          </a:xfrm>
+          <a:prstGeom prst="roundRect">
+            <a:avLst>
+              <a:gd name="adj" fmla="val 50000"/>
+            </a:avLst>
+          </a:prstGeom>
+          <a:solidFill>
+            <a:srgbClr val="FFFFFF">
+              <a:alpha val="85000"/>
+            </a:srgbClr>
+          </a:solidFill>
+          <a:ln>
+            <a:noFill/>
+          </a:ln>
+          <a:effectLst/>
+        </p:spPr>
+        <p:style>
+          <a:lnRef idx="1">
+            <a:schemeClr val="accent1"/>
+          </a:lnRef>
+          <a:fillRef idx="3">
+            <a:schemeClr val="accent1"/>
+          </a:fillRef>
+          <a:effectRef idx="2">
+            <a:schemeClr val="accent1"/>
+          </a:effectRef>
+          <a:fontRef idx="minor">
+            <a:schemeClr val="lt1"/>
+          </a:fontRef>
+        </p:style>
+        <p:txBody>
+          <a:bodyPr rtlCol="0" anchor="ctr"/>
+          <a:lstStyle/>
+          <a:p>
+            <a:pPr algn="ctr"/>
+          </a:p>
+        </p:txBody>
+      </p:sp>
+      <p:sp>
+        <p:nvSpPr>
+          <p:cNvPr id="13" name="TextBox 12"/>
           <p:cNvSpPr txBox="1"/>
           <p:nvPr/>
         </p:nvSpPr>
@@ -16622,7 +18078,7 @@
       </p:sp>
       <p:sp>
         <p:nvSpPr>
-          <p:cNvPr id="12" name="Rounded Rectangle 11"/>
+          <p:cNvPr id="14" name="Rounded Rectangle 13"/>
           <p:cNvSpPr/>
           <p:nvPr/>
         </p:nvSpPr>
@@ -16681,7 +18137,7 @@
       </p:sp>
       <p:sp>
         <p:nvSpPr>
-          <p:cNvPr id="13" name="Oval 12"/>
+          <p:cNvPr id="15" name="Oval 14"/>
           <p:cNvSpPr/>
           <p:nvPr/>
         </p:nvSpPr>
@@ -16734,7 +18190,7 @@
       </p:sp>
       <p:sp>
         <p:nvSpPr>
-          <p:cNvPr id="14" name="TextBox 13"/>
+          <p:cNvPr id="16" name="TextBox 15"/>
           <p:cNvSpPr txBox="1"/>
           <p:nvPr/>
         </p:nvSpPr>
@@ -16768,7 +18224,7 @@
       </p:sp>
       <p:sp>
         <p:nvSpPr>
-          <p:cNvPr id="15" name="Rounded Rectangle 14"/>
+          <p:cNvPr id="17" name="Rounded Rectangle 16"/>
           <p:cNvSpPr/>
           <p:nvPr/>
         </p:nvSpPr>
@@ -16824,7 +18280,7 @@
       </p:sp>
       <p:sp>
         <p:nvSpPr>
-          <p:cNvPr id="16" name="Oval 15"/>
+          <p:cNvPr id="18" name="Oval 17"/>
           <p:cNvSpPr/>
           <p:nvPr/>
         </p:nvSpPr>
@@ -16877,7 +18333,7 @@
       </p:sp>
       <p:sp>
         <p:nvSpPr>
-          <p:cNvPr id="17" name="TextBox 16"/>
+          <p:cNvPr id="19" name="TextBox 18"/>
           <p:cNvSpPr txBox="1"/>
           <p:nvPr/>
         </p:nvSpPr>
@@ -16911,7 +18367,7 @@
       </p:sp>
       <p:sp>
         <p:nvSpPr>
-          <p:cNvPr id="18" name="Rounded Rectangle 17"/>
+          <p:cNvPr id="20" name="Rounded Rectangle 19"/>
           <p:cNvSpPr/>
           <p:nvPr/>
         </p:nvSpPr>
@@ -16967,7 +18423,7 @@
       </p:sp>
       <p:sp>
         <p:nvSpPr>
-          <p:cNvPr id="19" name="Oval 18"/>
+          <p:cNvPr id="21" name="Oval 20"/>
           <p:cNvSpPr/>
           <p:nvPr/>
         </p:nvSpPr>
@@ -17020,7 +18476,7 @@
       </p:sp>
       <p:sp>
         <p:nvSpPr>
-          <p:cNvPr id="20" name="TextBox 19"/>
+          <p:cNvPr id="22" name="TextBox 21"/>
           <p:cNvSpPr txBox="1"/>
           <p:nvPr/>
         </p:nvSpPr>
@@ -17054,7 +18510,7 @@
       </p:sp>
       <p:sp>
         <p:nvSpPr>
-          <p:cNvPr id="21" name="Rounded Rectangle 20"/>
+          <p:cNvPr id="23" name="Rounded Rectangle 22"/>
           <p:cNvSpPr/>
           <p:nvPr/>
         </p:nvSpPr>
@@ -17110,7 +18566,7 @@
       </p:sp>
       <p:sp>
         <p:nvSpPr>
-          <p:cNvPr id="22" name="Oval 21"/>
+          <p:cNvPr id="24" name="Oval 23"/>
           <p:cNvSpPr/>
           <p:nvPr/>
         </p:nvSpPr>
@@ -17163,7 +18619,7 @@
       </p:sp>
       <p:sp>
         <p:nvSpPr>
-          <p:cNvPr id="23" name="TextBox 22"/>
+          <p:cNvPr id="25" name="TextBox 24"/>
           <p:cNvSpPr txBox="1"/>
           <p:nvPr/>
         </p:nvSpPr>
@@ -17197,7 +18653,7 @@
       </p:sp>
       <p:sp>
         <p:nvSpPr>
-          <p:cNvPr id="24" name="TextBox 23"/>
+          <p:cNvPr id="26" name="TextBox 25"/>
           <p:cNvSpPr txBox="1"/>
           <p:nvPr/>
         </p:nvSpPr>
@@ -17621,7 +19077,111 @@
       </p:pic>
       <p:sp>
         <p:nvSpPr>
-          <p:cNvPr id="11" name="TextBox 10"/>
+          <p:cNvPr id="11" name="Rounded Rectangle 10"/>
+          <p:cNvSpPr/>
+          <p:nvPr/>
+        </p:nvSpPr>
+        <p:spPr>
+          <a:xfrm>
+            <a:off x="411479" y="1444752"/>
+            <a:ext cx="11368735" cy="4800600"/>
+          </a:xfrm>
+          <a:prstGeom prst="roundRect">
+            <a:avLst>
+              <a:gd name="adj" fmla="val 4000"/>
+            </a:avLst>
+          </a:prstGeom>
+          <a:solidFill>
+            <a:srgbClr val="FFFFFF">
+              <a:alpha val="84000"/>
+            </a:srgbClr>
+          </a:solidFill>
+          <a:ln w="19050">
+            <a:solidFill>
+              <a:srgbClr val="FFFFFF"/>
+            </a:solidFill>
+          </a:ln>
+          <a:effectLst>
+            <a:outerShdw blurRad="203200" dist="50800" dir="5400000" algn="t" rotWithShape="0">
+              <a:srgbClr val="1A2340">
+                <a:alpha val="20000"/>
+              </a:srgbClr>
+            </a:outerShdw>
+          </a:effectLst>
+        </p:spPr>
+        <p:style>
+          <a:lnRef idx="1">
+            <a:schemeClr val="accent1"/>
+          </a:lnRef>
+          <a:fillRef idx="3">
+            <a:schemeClr val="accent1"/>
+          </a:fillRef>
+          <a:effectRef idx="2">
+            <a:schemeClr val="accent1"/>
+          </a:effectRef>
+          <a:fontRef idx="minor">
+            <a:schemeClr val="lt1"/>
+          </a:fontRef>
+        </p:style>
+        <p:txBody>
+          <a:bodyPr rtlCol="0" anchor="ctr"/>
+          <a:lstStyle/>
+          <a:p>
+            <a:pPr algn="ctr"/>
+          </a:p>
+        </p:txBody>
+      </p:sp>
+      <p:sp>
+        <p:nvSpPr>
+          <p:cNvPr id="12" name="Rounded Rectangle 11"/>
+          <p:cNvSpPr/>
+          <p:nvPr/>
+        </p:nvSpPr>
+        <p:spPr>
+          <a:xfrm>
+            <a:off x="731519" y="1508760"/>
+            <a:ext cx="10728655" cy="32004"/>
+          </a:xfrm>
+          <a:prstGeom prst="roundRect">
+            <a:avLst>
+              <a:gd name="adj" fmla="val 50000"/>
+            </a:avLst>
+          </a:prstGeom>
+          <a:solidFill>
+            <a:srgbClr val="FFFFFF">
+              <a:alpha val="85000"/>
+            </a:srgbClr>
+          </a:solidFill>
+          <a:ln>
+            <a:noFill/>
+          </a:ln>
+          <a:effectLst/>
+        </p:spPr>
+        <p:style>
+          <a:lnRef idx="1">
+            <a:schemeClr val="accent1"/>
+          </a:lnRef>
+          <a:fillRef idx="3">
+            <a:schemeClr val="accent1"/>
+          </a:fillRef>
+          <a:effectRef idx="2">
+            <a:schemeClr val="accent1"/>
+          </a:effectRef>
+          <a:fontRef idx="minor">
+            <a:schemeClr val="lt1"/>
+          </a:fontRef>
+        </p:style>
+        <p:txBody>
+          <a:bodyPr rtlCol="0" anchor="ctr"/>
+          <a:lstStyle/>
+          <a:p>
+            <a:pPr algn="ctr"/>
+          </a:p>
+        </p:txBody>
+      </p:sp>
+      <p:sp>
+        <p:nvSpPr>
+          <p:cNvPr id="13" name="TextBox 12"/>
           <p:cNvSpPr txBox="1"/>
           <p:nvPr/>
         </p:nvSpPr>
@@ -17655,7 +19215,7 @@
       </p:sp>
       <p:sp>
         <p:nvSpPr>
-          <p:cNvPr id="12" name="Rounded Rectangle 11"/>
+          <p:cNvPr id="14" name="Rounded Rectangle 13"/>
           <p:cNvSpPr/>
           <p:nvPr/>
         </p:nvSpPr>
@@ -17711,7 +19271,7 @@
       </p:sp>
       <p:sp>
         <p:nvSpPr>
-          <p:cNvPr id="13" name="Oval 12"/>
+          <p:cNvPr id="15" name="Oval 14"/>
           <p:cNvSpPr/>
           <p:nvPr/>
         </p:nvSpPr>
@@ -17764,7 +19324,7 @@
       </p:sp>
       <p:sp>
         <p:nvSpPr>
-          <p:cNvPr id="14" name="TextBox 13"/>
+          <p:cNvPr id="16" name="TextBox 15"/>
           <p:cNvSpPr txBox="1"/>
           <p:nvPr/>
         </p:nvSpPr>
@@ -17798,7 +19358,7 @@
       </p:sp>
       <p:sp>
         <p:nvSpPr>
-          <p:cNvPr id="15" name="Rounded Rectangle 14"/>
+          <p:cNvPr id="17" name="Rounded Rectangle 16"/>
           <p:cNvSpPr/>
           <p:nvPr/>
         </p:nvSpPr>
@@ -17854,7 +19414,7 @@
       </p:sp>
       <p:sp>
         <p:nvSpPr>
-          <p:cNvPr id="16" name="Oval 15"/>
+          <p:cNvPr id="18" name="Oval 17"/>
           <p:cNvSpPr/>
           <p:nvPr/>
         </p:nvSpPr>
@@ -17907,7 +19467,7 @@
       </p:sp>
       <p:sp>
         <p:nvSpPr>
-          <p:cNvPr id="17" name="TextBox 16"/>
+          <p:cNvPr id="19" name="TextBox 18"/>
           <p:cNvSpPr txBox="1"/>
           <p:nvPr/>
         </p:nvSpPr>
@@ -17941,7 +19501,7 @@
       </p:sp>
       <p:sp>
         <p:nvSpPr>
-          <p:cNvPr id="18" name="Rounded Rectangle 17"/>
+          <p:cNvPr id="20" name="Rounded Rectangle 19"/>
           <p:cNvSpPr/>
           <p:nvPr/>
         </p:nvSpPr>
@@ -17997,7 +19557,7 @@
       </p:sp>
       <p:sp>
         <p:nvSpPr>
-          <p:cNvPr id="19" name="Oval 18"/>
+          <p:cNvPr id="21" name="Oval 20"/>
           <p:cNvSpPr/>
           <p:nvPr/>
         </p:nvSpPr>
@@ -18050,7 +19610,7 @@
       </p:sp>
       <p:sp>
         <p:nvSpPr>
-          <p:cNvPr id="20" name="TextBox 19"/>
+          <p:cNvPr id="22" name="TextBox 21"/>
           <p:cNvSpPr txBox="1"/>
           <p:nvPr/>
         </p:nvSpPr>
@@ -18084,7 +19644,7 @@
       </p:sp>
       <p:sp>
         <p:nvSpPr>
-          <p:cNvPr id="21" name="Rounded Rectangle 20"/>
+          <p:cNvPr id="23" name="Rounded Rectangle 22"/>
           <p:cNvSpPr/>
           <p:nvPr/>
         </p:nvSpPr>
@@ -18140,7 +19700,7 @@
       </p:sp>
       <p:sp>
         <p:nvSpPr>
-          <p:cNvPr id="22" name="Oval 21"/>
+          <p:cNvPr id="24" name="Oval 23"/>
           <p:cNvSpPr/>
           <p:nvPr/>
         </p:nvSpPr>
@@ -18193,7 +19753,7 @@
       </p:sp>
       <p:sp>
         <p:nvSpPr>
-          <p:cNvPr id="23" name="TextBox 22"/>
+          <p:cNvPr id="25" name="TextBox 24"/>
           <p:cNvSpPr txBox="1"/>
           <p:nvPr/>
         </p:nvSpPr>
@@ -18608,7 +20168,111 @@
       </p:pic>
       <p:sp>
         <p:nvSpPr>
-          <p:cNvPr id="11" name="TextBox 10"/>
+          <p:cNvPr id="11" name="Rounded Rectangle 10"/>
+          <p:cNvSpPr/>
+          <p:nvPr/>
+        </p:nvSpPr>
+        <p:spPr>
+          <a:xfrm>
+            <a:off x="411479" y="1444752"/>
+            <a:ext cx="11368735" cy="4800600"/>
+          </a:xfrm>
+          <a:prstGeom prst="roundRect">
+            <a:avLst>
+              <a:gd name="adj" fmla="val 4000"/>
+            </a:avLst>
+          </a:prstGeom>
+          <a:solidFill>
+            <a:srgbClr val="FFFFFF">
+              <a:alpha val="84000"/>
+            </a:srgbClr>
+          </a:solidFill>
+          <a:ln w="19050">
+            <a:solidFill>
+              <a:srgbClr val="FFFFFF"/>
+            </a:solidFill>
+          </a:ln>
+          <a:effectLst>
+            <a:outerShdw blurRad="203200" dist="50800" dir="5400000" algn="t" rotWithShape="0">
+              <a:srgbClr val="1A2340">
+                <a:alpha val="20000"/>
+              </a:srgbClr>
+            </a:outerShdw>
+          </a:effectLst>
+        </p:spPr>
+        <p:style>
+          <a:lnRef idx="1">
+            <a:schemeClr val="accent1"/>
+          </a:lnRef>
+          <a:fillRef idx="3">
+            <a:schemeClr val="accent1"/>
+          </a:fillRef>
+          <a:effectRef idx="2">
+            <a:schemeClr val="accent1"/>
+          </a:effectRef>
+          <a:fontRef idx="minor">
+            <a:schemeClr val="lt1"/>
+          </a:fontRef>
+        </p:style>
+        <p:txBody>
+          <a:bodyPr rtlCol="0" anchor="ctr"/>
+          <a:lstStyle/>
+          <a:p>
+            <a:pPr algn="ctr"/>
+          </a:p>
+        </p:txBody>
+      </p:sp>
+      <p:sp>
+        <p:nvSpPr>
+          <p:cNvPr id="12" name="Rounded Rectangle 11"/>
+          <p:cNvSpPr/>
+          <p:nvPr/>
+        </p:nvSpPr>
+        <p:spPr>
+          <a:xfrm>
+            <a:off x="731519" y="1508760"/>
+            <a:ext cx="10728655" cy="32004"/>
+          </a:xfrm>
+          <a:prstGeom prst="roundRect">
+            <a:avLst>
+              <a:gd name="adj" fmla="val 50000"/>
+            </a:avLst>
+          </a:prstGeom>
+          <a:solidFill>
+            <a:srgbClr val="FFFFFF">
+              <a:alpha val="85000"/>
+            </a:srgbClr>
+          </a:solidFill>
+          <a:ln>
+            <a:noFill/>
+          </a:ln>
+          <a:effectLst/>
+        </p:spPr>
+        <p:style>
+          <a:lnRef idx="1">
+            <a:schemeClr val="accent1"/>
+          </a:lnRef>
+          <a:fillRef idx="3">
+            <a:schemeClr val="accent1"/>
+          </a:fillRef>
+          <a:effectRef idx="2">
+            <a:schemeClr val="accent1"/>
+          </a:effectRef>
+          <a:fontRef idx="minor">
+            <a:schemeClr val="lt1"/>
+          </a:fontRef>
+        </p:style>
+        <p:txBody>
+          <a:bodyPr rtlCol="0" anchor="ctr"/>
+          <a:lstStyle/>
+          <a:p>
+            <a:pPr algn="ctr"/>
+          </a:p>
+        </p:txBody>
+      </p:sp>
+      <p:sp>
+        <p:nvSpPr>
+          <p:cNvPr id="13" name="TextBox 12"/>
           <p:cNvSpPr txBox="1"/>
           <p:nvPr/>
         </p:nvSpPr>
@@ -18642,7 +20306,7 @@
       </p:sp>
       <p:sp>
         <p:nvSpPr>
-          <p:cNvPr id="12" name="Rounded Rectangle 11"/>
+          <p:cNvPr id="14" name="Rounded Rectangle 13"/>
           <p:cNvSpPr/>
           <p:nvPr/>
         </p:nvSpPr>
@@ -18698,7 +20362,7 @@
       </p:sp>
       <p:sp>
         <p:nvSpPr>
-          <p:cNvPr id="13" name="Oval 12"/>
+          <p:cNvPr id="15" name="Oval 14"/>
           <p:cNvSpPr/>
           <p:nvPr/>
         </p:nvSpPr>
@@ -18751,7 +20415,7 @@
       </p:sp>
       <p:sp>
         <p:nvSpPr>
-          <p:cNvPr id="14" name="TextBox 13"/>
+          <p:cNvPr id="16" name="TextBox 15"/>
           <p:cNvSpPr txBox="1"/>
           <p:nvPr/>
         </p:nvSpPr>
@@ -18785,7 +20449,7 @@
       </p:sp>
       <p:sp>
         <p:nvSpPr>
-          <p:cNvPr id="15" name="Rounded Rectangle 14"/>
+          <p:cNvPr id="17" name="Rounded Rectangle 16"/>
           <p:cNvSpPr/>
           <p:nvPr/>
         </p:nvSpPr>
@@ -18841,7 +20505,7 @@
       </p:sp>
       <p:sp>
         <p:nvSpPr>
-          <p:cNvPr id="16" name="Oval 15"/>
+          <p:cNvPr id="18" name="Oval 17"/>
           <p:cNvSpPr/>
           <p:nvPr/>
         </p:nvSpPr>
@@ -18894,7 +20558,7 @@
       </p:sp>
       <p:sp>
         <p:nvSpPr>
-          <p:cNvPr id="17" name="TextBox 16"/>
+          <p:cNvPr id="19" name="TextBox 18"/>
           <p:cNvSpPr txBox="1"/>
           <p:nvPr/>
         </p:nvSpPr>
@@ -18928,7 +20592,7 @@
       </p:sp>
       <p:sp>
         <p:nvSpPr>
-          <p:cNvPr id="18" name="Rounded Rectangle 17"/>
+          <p:cNvPr id="20" name="Rounded Rectangle 19"/>
           <p:cNvSpPr/>
           <p:nvPr/>
         </p:nvSpPr>
@@ -18987,7 +20651,7 @@
       </p:sp>
       <p:sp>
         <p:nvSpPr>
-          <p:cNvPr id="19" name="Oval 18"/>
+          <p:cNvPr id="21" name="Oval 20"/>
           <p:cNvSpPr/>
           <p:nvPr/>
         </p:nvSpPr>
@@ -19040,7 +20704,7 @@
       </p:sp>
       <p:sp>
         <p:nvSpPr>
-          <p:cNvPr id="20" name="TextBox 19"/>
+          <p:cNvPr id="22" name="TextBox 21"/>
           <p:cNvSpPr txBox="1"/>
           <p:nvPr/>
         </p:nvSpPr>
@@ -19074,7 +20738,7 @@
       </p:sp>
       <p:sp>
         <p:nvSpPr>
-          <p:cNvPr id="21" name="Rounded Rectangle 20"/>
+          <p:cNvPr id="23" name="Rounded Rectangle 22"/>
           <p:cNvSpPr/>
           <p:nvPr/>
         </p:nvSpPr>
@@ -19130,7 +20794,7 @@
       </p:sp>
       <p:sp>
         <p:nvSpPr>
-          <p:cNvPr id="22" name="Oval 21"/>
+          <p:cNvPr id="24" name="Oval 23"/>
           <p:cNvSpPr/>
           <p:nvPr/>
         </p:nvSpPr>
@@ -19183,7 +20847,7 @@
       </p:sp>
       <p:sp>
         <p:nvSpPr>
-          <p:cNvPr id="23" name="TextBox 22"/>
+          <p:cNvPr id="25" name="TextBox 24"/>
           <p:cNvSpPr txBox="1"/>
           <p:nvPr/>
         </p:nvSpPr>
@@ -19217,7 +20881,7 @@
       </p:sp>
       <p:sp>
         <p:nvSpPr>
-          <p:cNvPr id="24" name="TextBox 23"/>
+          <p:cNvPr id="26" name="TextBox 25"/>
           <p:cNvSpPr txBox="1"/>
           <p:nvPr/>
         </p:nvSpPr>
@@ -19641,7 +21305,111 @@
       </p:pic>
       <p:sp>
         <p:nvSpPr>
-          <p:cNvPr id="11" name="TextBox 10"/>
+          <p:cNvPr id="11" name="Rounded Rectangle 10"/>
+          <p:cNvSpPr/>
+          <p:nvPr/>
+        </p:nvSpPr>
+        <p:spPr>
+          <a:xfrm>
+            <a:off x="411479" y="1444752"/>
+            <a:ext cx="11368735" cy="4800600"/>
+          </a:xfrm>
+          <a:prstGeom prst="roundRect">
+            <a:avLst>
+              <a:gd name="adj" fmla="val 4000"/>
+            </a:avLst>
+          </a:prstGeom>
+          <a:solidFill>
+            <a:srgbClr val="FFFFFF">
+              <a:alpha val="84000"/>
+            </a:srgbClr>
+          </a:solidFill>
+          <a:ln w="19050">
+            <a:solidFill>
+              <a:srgbClr val="FFFFFF"/>
+            </a:solidFill>
+          </a:ln>
+          <a:effectLst>
+            <a:outerShdw blurRad="203200" dist="50800" dir="5400000" algn="t" rotWithShape="0">
+              <a:srgbClr val="1A2340">
+                <a:alpha val="20000"/>
+              </a:srgbClr>
+            </a:outerShdw>
+          </a:effectLst>
+        </p:spPr>
+        <p:style>
+          <a:lnRef idx="1">
+            <a:schemeClr val="accent1"/>
+          </a:lnRef>
+          <a:fillRef idx="3">
+            <a:schemeClr val="accent1"/>
+          </a:fillRef>
+          <a:effectRef idx="2">
+            <a:schemeClr val="accent1"/>
+          </a:effectRef>
+          <a:fontRef idx="minor">
+            <a:schemeClr val="lt1"/>
+          </a:fontRef>
+        </p:style>
+        <p:txBody>
+          <a:bodyPr rtlCol="0" anchor="ctr"/>
+          <a:lstStyle/>
+          <a:p>
+            <a:pPr algn="ctr"/>
+          </a:p>
+        </p:txBody>
+      </p:sp>
+      <p:sp>
+        <p:nvSpPr>
+          <p:cNvPr id="12" name="Rounded Rectangle 11"/>
+          <p:cNvSpPr/>
+          <p:nvPr/>
+        </p:nvSpPr>
+        <p:spPr>
+          <a:xfrm>
+            <a:off x="731519" y="1508760"/>
+            <a:ext cx="10728655" cy="32004"/>
+          </a:xfrm>
+          <a:prstGeom prst="roundRect">
+            <a:avLst>
+              <a:gd name="adj" fmla="val 50000"/>
+            </a:avLst>
+          </a:prstGeom>
+          <a:solidFill>
+            <a:srgbClr val="FFFFFF">
+              <a:alpha val="85000"/>
+            </a:srgbClr>
+          </a:solidFill>
+          <a:ln>
+            <a:noFill/>
+          </a:ln>
+          <a:effectLst/>
+        </p:spPr>
+        <p:style>
+          <a:lnRef idx="1">
+            <a:schemeClr val="accent1"/>
+          </a:lnRef>
+          <a:fillRef idx="3">
+            <a:schemeClr val="accent1"/>
+          </a:fillRef>
+          <a:effectRef idx="2">
+            <a:schemeClr val="accent1"/>
+          </a:effectRef>
+          <a:fontRef idx="minor">
+            <a:schemeClr val="lt1"/>
+          </a:fontRef>
+        </p:style>
+        <p:txBody>
+          <a:bodyPr rtlCol="0" anchor="ctr"/>
+          <a:lstStyle/>
+          <a:p>
+            <a:pPr algn="ctr"/>
+          </a:p>
+        </p:txBody>
+      </p:sp>
+      <p:sp>
+        <p:nvSpPr>
+          <p:cNvPr id="13" name="TextBox 12"/>
           <p:cNvSpPr txBox="1"/>
           <p:nvPr/>
         </p:nvSpPr>
@@ -19675,7 +21443,7 @@
       </p:sp>
       <p:sp>
         <p:nvSpPr>
-          <p:cNvPr id="12" name="Rounded Rectangle 11"/>
+          <p:cNvPr id="14" name="Rounded Rectangle 13"/>
           <p:cNvSpPr/>
           <p:nvPr/>
         </p:nvSpPr>
@@ -19731,7 +21499,7 @@
       </p:sp>
       <p:sp>
         <p:nvSpPr>
-          <p:cNvPr id="13" name="Oval 12"/>
+          <p:cNvPr id="15" name="Oval 14"/>
           <p:cNvSpPr/>
           <p:nvPr/>
         </p:nvSpPr>
@@ -19784,7 +21552,7 @@
       </p:sp>
       <p:sp>
         <p:nvSpPr>
-          <p:cNvPr id="14" name="TextBox 13"/>
+          <p:cNvPr id="16" name="TextBox 15"/>
           <p:cNvSpPr txBox="1"/>
           <p:nvPr/>
         </p:nvSpPr>
@@ -19818,7 +21586,7 @@
       </p:sp>
       <p:sp>
         <p:nvSpPr>
-          <p:cNvPr id="15" name="Rounded Rectangle 14"/>
+          <p:cNvPr id="17" name="Rounded Rectangle 16"/>
           <p:cNvSpPr/>
           <p:nvPr/>
         </p:nvSpPr>
@@ -19874,7 +21642,7 @@
       </p:sp>
       <p:sp>
         <p:nvSpPr>
-          <p:cNvPr id="16" name="Oval 15"/>
+          <p:cNvPr id="18" name="Oval 17"/>
           <p:cNvSpPr/>
           <p:nvPr/>
         </p:nvSpPr>
@@ -19927,7 +21695,7 @@
       </p:sp>
       <p:sp>
         <p:nvSpPr>
-          <p:cNvPr id="17" name="TextBox 16"/>
+          <p:cNvPr id="19" name="TextBox 18"/>
           <p:cNvSpPr txBox="1"/>
           <p:nvPr/>
         </p:nvSpPr>
@@ -19961,7 +21729,7 @@
       </p:sp>
       <p:sp>
         <p:nvSpPr>
-          <p:cNvPr id="18" name="Rounded Rectangle 17"/>
+          <p:cNvPr id="20" name="Rounded Rectangle 19"/>
           <p:cNvSpPr/>
           <p:nvPr/>
         </p:nvSpPr>
@@ -20017,7 +21785,7 @@
       </p:sp>
       <p:sp>
         <p:nvSpPr>
-          <p:cNvPr id="19" name="Oval 18"/>
+          <p:cNvPr id="21" name="Oval 20"/>
           <p:cNvSpPr/>
           <p:nvPr/>
         </p:nvSpPr>
@@ -20070,7 +21838,7 @@
       </p:sp>
       <p:sp>
         <p:nvSpPr>
-          <p:cNvPr id="20" name="TextBox 19"/>
+          <p:cNvPr id="22" name="TextBox 21"/>
           <p:cNvSpPr txBox="1"/>
           <p:nvPr/>
         </p:nvSpPr>
@@ -20104,7 +21872,7 @@
       </p:sp>
       <p:sp>
         <p:nvSpPr>
-          <p:cNvPr id="21" name="Rounded Rectangle 20"/>
+          <p:cNvPr id="23" name="Rounded Rectangle 22"/>
           <p:cNvSpPr/>
           <p:nvPr/>
         </p:nvSpPr>
@@ -20160,7 +21928,7 @@
       </p:sp>
       <p:sp>
         <p:nvSpPr>
-          <p:cNvPr id="22" name="Oval 21"/>
+          <p:cNvPr id="24" name="Oval 23"/>
           <p:cNvSpPr/>
           <p:nvPr/>
         </p:nvSpPr>
@@ -20213,7 +21981,7 @@
       </p:sp>
       <p:sp>
         <p:nvSpPr>
-          <p:cNvPr id="23" name="TextBox 22"/>
+          <p:cNvPr id="25" name="TextBox 24"/>
           <p:cNvSpPr txBox="1"/>
           <p:nvPr/>
         </p:nvSpPr>
@@ -20628,7 +22396,111 @@
       </p:pic>
       <p:sp>
         <p:nvSpPr>
-          <p:cNvPr id="11" name="TextBox 10"/>
+          <p:cNvPr id="11" name="Rounded Rectangle 10"/>
+          <p:cNvSpPr/>
+          <p:nvPr/>
+        </p:nvSpPr>
+        <p:spPr>
+          <a:xfrm>
+            <a:off x="411479" y="1444752"/>
+            <a:ext cx="11368735" cy="4800600"/>
+          </a:xfrm>
+          <a:prstGeom prst="roundRect">
+            <a:avLst>
+              <a:gd name="adj" fmla="val 4000"/>
+            </a:avLst>
+          </a:prstGeom>
+          <a:solidFill>
+            <a:srgbClr val="FFFFFF">
+              <a:alpha val="84000"/>
+            </a:srgbClr>
+          </a:solidFill>
+          <a:ln w="19050">
+            <a:solidFill>
+              <a:srgbClr val="FFFFFF"/>
+            </a:solidFill>
+          </a:ln>
+          <a:effectLst>
+            <a:outerShdw blurRad="203200" dist="50800" dir="5400000" algn="t" rotWithShape="0">
+              <a:srgbClr val="1A2340">
+                <a:alpha val="20000"/>
+              </a:srgbClr>
+            </a:outerShdw>
+          </a:effectLst>
+        </p:spPr>
+        <p:style>
+          <a:lnRef idx="1">
+            <a:schemeClr val="accent1"/>
+          </a:lnRef>
+          <a:fillRef idx="3">
+            <a:schemeClr val="accent1"/>
+          </a:fillRef>
+          <a:effectRef idx="2">
+            <a:schemeClr val="accent1"/>
+          </a:effectRef>
+          <a:fontRef idx="minor">
+            <a:schemeClr val="lt1"/>
+          </a:fontRef>
+        </p:style>
+        <p:txBody>
+          <a:bodyPr rtlCol="0" anchor="ctr"/>
+          <a:lstStyle/>
+          <a:p>
+            <a:pPr algn="ctr"/>
+          </a:p>
+        </p:txBody>
+      </p:sp>
+      <p:sp>
+        <p:nvSpPr>
+          <p:cNvPr id="12" name="Rounded Rectangle 11"/>
+          <p:cNvSpPr/>
+          <p:nvPr/>
+        </p:nvSpPr>
+        <p:spPr>
+          <a:xfrm>
+            <a:off x="731519" y="1508760"/>
+            <a:ext cx="10728655" cy="32004"/>
+          </a:xfrm>
+          <a:prstGeom prst="roundRect">
+            <a:avLst>
+              <a:gd name="adj" fmla="val 50000"/>
+            </a:avLst>
+          </a:prstGeom>
+          <a:solidFill>
+            <a:srgbClr val="FFFFFF">
+              <a:alpha val="85000"/>
+            </a:srgbClr>
+          </a:solidFill>
+          <a:ln>
+            <a:noFill/>
+          </a:ln>
+          <a:effectLst/>
+        </p:spPr>
+        <p:style>
+          <a:lnRef idx="1">
+            <a:schemeClr val="accent1"/>
+          </a:lnRef>
+          <a:fillRef idx="3">
+            <a:schemeClr val="accent1"/>
+          </a:fillRef>
+          <a:effectRef idx="2">
+            <a:schemeClr val="accent1"/>
+          </a:effectRef>
+          <a:fontRef idx="minor">
+            <a:schemeClr val="lt1"/>
+          </a:fontRef>
+        </p:style>
+        <p:txBody>
+          <a:bodyPr rtlCol="0" anchor="ctr"/>
+          <a:lstStyle/>
+          <a:p>
+            <a:pPr algn="ctr"/>
+          </a:p>
+        </p:txBody>
+      </p:sp>
+      <p:sp>
+        <p:nvSpPr>
+          <p:cNvPr id="13" name="TextBox 12"/>
           <p:cNvSpPr txBox="1"/>
           <p:nvPr/>
         </p:nvSpPr>
@@ -20662,7 +22534,7 @@
       </p:sp>
       <p:sp>
         <p:nvSpPr>
-          <p:cNvPr id="12" name="Rounded Rectangle 11"/>
+          <p:cNvPr id="14" name="Rounded Rectangle 13"/>
           <p:cNvSpPr/>
           <p:nvPr/>
         </p:nvSpPr>
@@ -20721,7 +22593,7 @@
       </p:sp>
       <p:sp>
         <p:nvSpPr>
-          <p:cNvPr id="13" name="Oval 12"/>
+          <p:cNvPr id="15" name="Oval 14"/>
           <p:cNvSpPr/>
           <p:nvPr/>
         </p:nvSpPr>
@@ -20774,7 +22646,7 @@
       </p:sp>
       <p:sp>
         <p:nvSpPr>
-          <p:cNvPr id="14" name="TextBox 13"/>
+          <p:cNvPr id="16" name="TextBox 15"/>
           <p:cNvSpPr txBox="1"/>
           <p:nvPr/>
         </p:nvSpPr>
@@ -20808,7 +22680,7 @@
       </p:sp>
       <p:sp>
         <p:nvSpPr>
-          <p:cNvPr id="15" name="Rounded Rectangle 14"/>
+          <p:cNvPr id="17" name="Rounded Rectangle 16"/>
           <p:cNvSpPr/>
           <p:nvPr/>
         </p:nvSpPr>
@@ -20864,7 +22736,7 @@
       </p:sp>
       <p:sp>
         <p:nvSpPr>
-          <p:cNvPr id="16" name="Oval 15"/>
+          <p:cNvPr id="18" name="Oval 17"/>
           <p:cNvSpPr/>
           <p:nvPr/>
         </p:nvSpPr>
@@ -20917,7 +22789,7 @@
       </p:sp>
       <p:sp>
         <p:nvSpPr>
-          <p:cNvPr id="17" name="TextBox 16"/>
+          <p:cNvPr id="19" name="TextBox 18"/>
           <p:cNvSpPr txBox="1"/>
           <p:nvPr/>
         </p:nvSpPr>
@@ -20951,7 +22823,7 @@
       </p:sp>
       <p:sp>
         <p:nvSpPr>
-          <p:cNvPr id="18" name="Rounded Rectangle 17"/>
+          <p:cNvPr id="20" name="Rounded Rectangle 19"/>
           <p:cNvSpPr/>
           <p:nvPr/>
         </p:nvSpPr>
@@ -21007,7 +22879,7 @@
       </p:sp>
       <p:sp>
         <p:nvSpPr>
-          <p:cNvPr id="19" name="Oval 18"/>
+          <p:cNvPr id="21" name="Oval 20"/>
           <p:cNvSpPr/>
           <p:nvPr/>
         </p:nvSpPr>
@@ -21060,7 +22932,7 @@
       </p:sp>
       <p:sp>
         <p:nvSpPr>
-          <p:cNvPr id="20" name="TextBox 19"/>
+          <p:cNvPr id="22" name="TextBox 21"/>
           <p:cNvSpPr txBox="1"/>
           <p:nvPr/>
         </p:nvSpPr>
@@ -21094,7 +22966,7 @@
       </p:sp>
       <p:sp>
         <p:nvSpPr>
-          <p:cNvPr id="21" name="Rounded Rectangle 20"/>
+          <p:cNvPr id="23" name="Rounded Rectangle 22"/>
           <p:cNvSpPr/>
           <p:nvPr/>
         </p:nvSpPr>
@@ -21150,7 +23022,7 @@
       </p:sp>
       <p:sp>
         <p:nvSpPr>
-          <p:cNvPr id="22" name="Oval 21"/>
+          <p:cNvPr id="24" name="Oval 23"/>
           <p:cNvSpPr/>
           <p:nvPr/>
         </p:nvSpPr>
@@ -21203,7 +23075,7 @@
       </p:sp>
       <p:sp>
         <p:nvSpPr>
-          <p:cNvPr id="23" name="TextBox 22"/>
+          <p:cNvPr id="25" name="TextBox 24"/>
           <p:cNvSpPr txBox="1"/>
           <p:nvPr/>
         </p:nvSpPr>
@@ -21237,7 +23109,7 @@
       </p:sp>
       <p:sp>
         <p:nvSpPr>
-          <p:cNvPr id="24" name="TextBox 23"/>
+          <p:cNvPr id="26" name="TextBox 25"/>
           <p:cNvSpPr txBox="1"/>
           <p:nvPr/>
         </p:nvSpPr>
@@ -22262,7 +24134,111 @@
       </p:pic>
       <p:sp>
         <p:nvSpPr>
-          <p:cNvPr id="11" name="Oval 10"/>
+          <p:cNvPr id="11" name="Rounded Rectangle 10"/>
+          <p:cNvSpPr/>
+          <p:nvPr/>
+        </p:nvSpPr>
+        <p:spPr>
+          <a:xfrm>
+            <a:off x="411479" y="1444752"/>
+            <a:ext cx="11368735" cy="4800600"/>
+          </a:xfrm>
+          <a:prstGeom prst="roundRect">
+            <a:avLst>
+              <a:gd name="adj" fmla="val 4000"/>
+            </a:avLst>
+          </a:prstGeom>
+          <a:solidFill>
+            <a:srgbClr val="FFFFFF">
+              <a:alpha val="84000"/>
+            </a:srgbClr>
+          </a:solidFill>
+          <a:ln w="19050">
+            <a:solidFill>
+              <a:srgbClr val="FFFFFF"/>
+            </a:solidFill>
+          </a:ln>
+          <a:effectLst>
+            <a:outerShdw blurRad="203200" dist="50800" dir="5400000" algn="t" rotWithShape="0">
+              <a:srgbClr val="1A2340">
+                <a:alpha val="20000"/>
+              </a:srgbClr>
+            </a:outerShdw>
+          </a:effectLst>
+        </p:spPr>
+        <p:style>
+          <a:lnRef idx="1">
+            <a:schemeClr val="accent1"/>
+          </a:lnRef>
+          <a:fillRef idx="3">
+            <a:schemeClr val="accent1"/>
+          </a:fillRef>
+          <a:effectRef idx="2">
+            <a:schemeClr val="accent1"/>
+          </a:effectRef>
+          <a:fontRef idx="minor">
+            <a:schemeClr val="lt1"/>
+          </a:fontRef>
+        </p:style>
+        <p:txBody>
+          <a:bodyPr rtlCol="0" anchor="ctr"/>
+          <a:lstStyle/>
+          <a:p>
+            <a:pPr algn="ctr"/>
+          </a:p>
+        </p:txBody>
+      </p:sp>
+      <p:sp>
+        <p:nvSpPr>
+          <p:cNvPr id="12" name="Rounded Rectangle 11"/>
+          <p:cNvSpPr/>
+          <p:nvPr/>
+        </p:nvSpPr>
+        <p:spPr>
+          <a:xfrm>
+            <a:off x="731519" y="1508760"/>
+            <a:ext cx="10728655" cy="32004"/>
+          </a:xfrm>
+          <a:prstGeom prst="roundRect">
+            <a:avLst>
+              <a:gd name="adj" fmla="val 50000"/>
+            </a:avLst>
+          </a:prstGeom>
+          <a:solidFill>
+            <a:srgbClr val="FFFFFF">
+              <a:alpha val="85000"/>
+            </a:srgbClr>
+          </a:solidFill>
+          <a:ln>
+            <a:noFill/>
+          </a:ln>
+          <a:effectLst/>
+        </p:spPr>
+        <p:style>
+          <a:lnRef idx="1">
+            <a:schemeClr val="accent1"/>
+          </a:lnRef>
+          <a:fillRef idx="3">
+            <a:schemeClr val="accent1"/>
+          </a:fillRef>
+          <a:effectRef idx="2">
+            <a:schemeClr val="accent1"/>
+          </a:effectRef>
+          <a:fontRef idx="minor">
+            <a:schemeClr val="lt1"/>
+          </a:fontRef>
+        </p:style>
+        <p:txBody>
+          <a:bodyPr rtlCol="0" anchor="ctr"/>
+          <a:lstStyle/>
+          <a:p>
+            <a:pPr algn="ctr"/>
+          </a:p>
+        </p:txBody>
+      </p:sp>
+      <p:sp>
+        <p:nvSpPr>
+          <p:cNvPr id="13" name="Oval 12"/>
           <p:cNvSpPr/>
           <p:nvPr/>
         </p:nvSpPr>
@@ -22315,7 +24291,7 @@
       </p:sp>
       <p:sp>
         <p:nvSpPr>
-          <p:cNvPr id="12" name="TextBox 11"/>
+          <p:cNvPr id="14" name="TextBox 13"/>
           <p:cNvSpPr txBox="1"/>
           <p:nvPr/>
         </p:nvSpPr>
@@ -22349,7 +24325,7 @@
       </p:sp>
       <p:sp>
         <p:nvSpPr>
-          <p:cNvPr id="13" name="Oval 12"/>
+          <p:cNvPr id="15" name="Oval 14"/>
           <p:cNvSpPr/>
           <p:nvPr/>
         </p:nvSpPr>
@@ -22402,7 +24378,7 @@
       </p:sp>
       <p:sp>
         <p:nvSpPr>
-          <p:cNvPr id="14" name="TextBox 13"/>
+          <p:cNvPr id="16" name="TextBox 15"/>
           <p:cNvSpPr txBox="1"/>
           <p:nvPr/>
         </p:nvSpPr>
@@ -22436,7 +24412,7 @@
       </p:sp>
       <p:sp>
         <p:nvSpPr>
-          <p:cNvPr id="15" name="Oval 14"/>
+          <p:cNvPr id="17" name="Oval 16"/>
           <p:cNvSpPr/>
           <p:nvPr/>
         </p:nvSpPr>
@@ -22489,7 +24465,7 @@
       </p:sp>
       <p:sp>
         <p:nvSpPr>
-          <p:cNvPr id="16" name="TextBox 15"/>
+          <p:cNvPr id="18" name="TextBox 17"/>
           <p:cNvSpPr txBox="1"/>
           <p:nvPr/>
         </p:nvSpPr>
@@ -22523,7 +24499,7 @@
       </p:sp>
       <p:sp>
         <p:nvSpPr>
-          <p:cNvPr id="17" name="Oval 16"/>
+          <p:cNvPr id="19" name="Oval 18"/>
           <p:cNvSpPr/>
           <p:nvPr/>
         </p:nvSpPr>
@@ -22576,7 +24552,7 @@
       </p:sp>
       <p:sp>
         <p:nvSpPr>
-          <p:cNvPr id="18" name="TextBox 17"/>
+          <p:cNvPr id="20" name="TextBox 19"/>
           <p:cNvSpPr txBox="1"/>
           <p:nvPr/>
         </p:nvSpPr>
@@ -22610,7 +24586,7 @@
       </p:sp>
       <p:sp>
         <p:nvSpPr>
-          <p:cNvPr id="19" name="Oval 18"/>
+          <p:cNvPr id="21" name="Oval 20"/>
           <p:cNvSpPr/>
           <p:nvPr/>
         </p:nvSpPr>
@@ -22663,7 +24639,7 @@
       </p:sp>
       <p:sp>
         <p:nvSpPr>
-          <p:cNvPr id="20" name="TextBox 19"/>
+          <p:cNvPr id="22" name="TextBox 21"/>
           <p:cNvSpPr txBox="1"/>
           <p:nvPr/>
         </p:nvSpPr>
@@ -22697,7 +24673,7 @@
       </p:sp>
       <p:sp>
         <p:nvSpPr>
-          <p:cNvPr id="21" name="Oval 20"/>
+          <p:cNvPr id="23" name="Oval 22"/>
           <p:cNvSpPr/>
           <p:nvPr/>
         </p:nvSpPr>
@@ -22750,7 +24726,7 @@
       </p:sp>
       <p:sp>
         <p:nvSpPr>
-          <p:cNvPr id="22" name="TextBox 21"/>
+          <p:cNvPr id="24" name="TextBox 23"/>
           <p:cNvSpPr txBox="1"/>
           <p:nvPr/>
         </p:nvSpPr>
@@ -22784,7 +24760,7 @@
       </p:sp>
       <p:sp>
         <p:nvSpPr>
-          <p:cNvPr id="23" name="Oval 22"/>
+          <p:cNvPr id="25" name="Oval 24"/>
           <p:cNvSpPr/>
           <p:nvPr/>
         </p:nvSpPr>
@@ -22837,7 +24813,7 @@
       </p:sp>
       <p:sp>
         <p:nvSpPr>
-          <p:cNvPr id="24" name="TextBox 23"/>
+          <p:cNvPr id="26" name="TextBox 25"/>
           <p:cNvSpPr txBox="1"/>
           <p:nvPr/>
         </p:nvSpPr>
@@ -23252,14 +25228,177 @@
       </p:pic>
       <p:sp>
         <p:nvSpPr>
-          <p:cNvPr id="11" name="TextBox 10"/>
+          <p:cNvPr id="11" name="Rounded Rectangle 10"/>
+          <p:cNvSpPr/>
+          <p:nvPr/>
+        </p:nvSpPr>
+        <p:spPr>
+          <a:xfrm>
+            <a:off x="411479" y="1444752"/>
+            <a:ext cx="11368735" cy="4800600"/>
+          </a:xfrm>
+          <a:prstGeom prst="roundRect">
+            <a:avLst>
+              <a:gd name="adj" fmla="val 4000"/>
+            </a:avLst>
+          </a:prstGeom>
+          <a:solidFill>
+            <a:srgbClr val="FFFFFF">
+              <a:alpha val="84000"/>
+            </a:srgbClr>
+          </a:solidFill>
+          <a:ln w="19050">
+            <a:solidFill>
+              <a:srgbClr val="FFFFFF"/>
+            </a:solidFill>
+          </a:ln>
+          <a:effectLst>
+            <a:outerShdw blurRad="203200" dist="50800" dir="5400000" algn="t" rotWithShape="0">
+              <a:srgbClr val="1A2340">
+                <a:alpha val="20000"/>
+              </a:srgbClr>
+            </a:outerShdw>
+          </a:effectLst>
+        </p:spPr>
+        <p:style>
+          <a:lnRef idx="1">
+            <a:schemeClr val="accent1"/>
+          </a:lnRef>
+          <a:fillRef idx="3">
+            <a:schemeClr val="accent1"/>
+          </a:fillRef>
+          <a:effectRef idx="2">
+            <a:schemeClr val="accent1"/>
+          </a:effectRef>
+          <a:fontRef idx="minor">
+            <a:schemeClr val="lt1"/>
+          </a:fontRef>
+        </p:style>
+        <p:txBody>
+          <a:bodyPr rtlCol="0" anchor="ctr"/>
+          <a:lstStyle/>
+          <a:p>
+            <a:pPr algn="ctr"/>
+          </a:p>
+        </p:txBody>
+      </p:sp>
+      <p:sp>
+        <p:nvSpPr>
+          <p:cNvPr id="12" name="Rounded Rectangle 11"/>
+          <p:cNvSpPr/>
+          <p:nvPr/>
+        </p:nvSpPr>
+        <p:spPr>
+          <a:xfrm>
+            <a:off x="731519" y="1508760"/>
+            <a:ext cx="10728655" cy="32004"/>
+          </a:xfrm>
+          <a:prstGeom prst="roundRect">
+            <a:avLst>
+              <a:gd name="adj" fmla="val 50000"/>
+            </a:avLst>
+          </a:prstGeom>
+          <a:solidFill>
+            <a:srgbClr val="FFFFFF">
+              <a:alpha val="85000"/>
+            </a:srgbClr>
+          </a:solidFill>
+          <a:ln>
+            <a:noFill/>
+          </a:ln>
+          <a:effectLst/>
+        </p:spPr>
+        <p:style>
+          <a:lnRef idx="1">
+            <a:schemeClr val="accent1"/>
+          </a:lnRef>
+          <a:fillRef idx="3">
+            <a:schemeClr val="accent1"/>
+          </a:fillRef>
+          <a:effectRef idx="2">
+            <a:schemeClr val="accent1"/>
+          </a:effectRef>
+          <a:fontRef idx="minor">
+            <a:schemeClr val="lt1"/>
+          </a:fontRef>
+        </p:style>
+        <p:txBody>
+          <a:bodyPr rtlCol="0" anchor="ctr"/>
+          <a:lstStyle/>
+          <a:p>
+            <a:pPr algn="ctr"/>
+          </a:p>
+        </p:txBody>
+      </p:sp>
+      <p:sp>
+        <p:nvSpPr>
+          <p:cNvPr id="13" name="Rounded Rectangle 12"/>
+          <p:cNvSpPr/>
+          <p:nvPr/>
+        </p:nvSpPr>
+        <p:spPr>
+          <a:xfrm>
+            <a:off x="548640" y="1591056"/>
+            <a:ext cx="64008" cy="315468"/>
+          </a:xfrm>
+          <a:prstGeom prst="roundRect">
+            <a:avLst>
+              <a:gd name="adj" fmla="val 50000"/>
+            </a:avLst>
+          </a:prstGeom>
+          <a:solidFill>
+            <a:srgbClr val="8D6A2A"/>
+          </a:solidFill>
+          <a:ln>
+            <a:noFill/>
+          </a:ln>
+          <a:effectLst>
+            <a:outerShdw blurRad="203200" dist="50800" dir="5400000" algn="t" rotWithShape="0">
+              <a:srgbClr val="1A2340">
+                <a:alpha val="20000"/>
+              </a:srgbClr>
+            </a:outerShdw>
+          </a:effectLst>
+          <a:scene3d>
+            <a:camera prst="orthographicFront"/>
+            <a:lightRig rig="threePt" dir="t"/>
+          </a:scene3d>
+          <a:sp3d>
+            <a:bevelT w="44450" h="25400" prst="softRound"/>
+          </a:sp3d>
+        </p:spPr>
+        <p:style>
+          <a:lnRef idx="1">
+            <a:schemeClr val="accent1"/>
+          </a:lnRef>
+          <a:fillRef idx="3">
+            <a:schemeClr val="accent1"/>
+          </a:fillRef>
+          <a:effectRef idx="2">
+            <a:schemeClr val="accent1"/>
+          </a:effectRef>
+          <a:fontRef idx="minor">
+            <a:schemeClr val="lt1"/>
+          </a:fontRef>
+        </p:style>
+        <p:txBody>
+          <a:bodyPr rtlCol="0" anchor="ctr"/>
+          <a:lstStyle/>
+          <a:p>
+            <a:pPr algn="ctr"/>
+          </a:p>
+        </p:txBody>
+      </p:sp>
+      <p:sp>
+        <p:nvSpPr>
+          <p:cNvPr id="14" name="TextBox 13"/>
           <p:cNvSpPr txBox="1"/>
           <p:nvPr/>
         </p:nvSpPr>
         <p:spPr>
           <a:xfrm>
-            <a:off x="548640" y="1554480"/>
-            <a:ext cx="11094415" cy="498348"/>
+            <a:off x="777240" y="1554480"/>
+            <a:ext cx="10865815" cy="498348"/>
           </a:xfrm>
           <a:prstGeom prst="rect">
             <a:avLst/>
@@ -23291,7 +25430,7 @@
       </p:sp>
       <p:sp>
         <p:nvSpPr>
-          <p:cNvPr id="12" name="Oval 11"/>
+          <p:cNvPr id="15" name="Oval 14"/>
           <p:cNvSpPr/>
           <p:nvPr/>
         </p:nvSpPr>
@@ -23344,7 +25483,7 @@
       </p:sp>
       <p:sp>
         <p:nvSpPr>
-          <p:cNvPr id="13" name="TextBox 12"/>
+          <p:cNvPr id="16" name="TextBox 15"/>
           <p:cNvSpPr txBox="1"/>
           <p:nvPr/>
         </p:nvSpPr>
@@ -23378,7 +25517,7 @@
       </p:sp>
       <p:sp>
         <p:nvSpPr>
-          <p:cNvPr id="14" name="Oval 13"/>
+          <p:cNvPr id="17" name="Oval 16"/>
           <p:cNvSpPr/>
           <p:nvPr/>
         </p:nvSpPr>
@@ -23431,7 +25570,7 @@
       </p:sp>
       <p:sp>
         <p:nvSpPr>
-          <p:cNvPr id="15" name="TextBox 14"/>
+          <p:cNvPr id="18" name="TextBox 17"/>
           <p:cNvSpPr txBox="1"/>
           <p:nvPr/>
         </p:nvSpPr>
@@ -23465,7 +25604,7 @@
       </p:sp>
       <p:sp>
         <p:nvSpPr>
-          <p:cNvPr id="16" name="Oval 15"/>
+          <p:cNvPr id="19" name="Oval 18"/>
           <p:cNvSpPr/>
           <p:nvPr/>
         </p:nvSpPr>
@@ -23518,7 +25657,7 @@
       </p:sp>
       <p:sp>
         <p:nvSpPr>
-          <p:cNvPr id="17" name="TextBox 16"/>
+          <p:cNvPr id="20" name="TextBox 19"/>
           <p:cNvSpPr txBox="1"/>
           <p:nvPr/>
         </p:nvSpPr>
@@ -23552,7 +25691,7 @@
       </p:sp>
       <p:sp>
         <p:nvSpPr>
-          <p:cNvPr id="18" name="Oval 17"/>
+          <p:cNvPr id="21" name="Oval 20"/>
           <p:cNvSpPr/>
           <p:nvPr/>
         </p:nvSpPr>
@@ -23605,7 +25744,7 @@
       </p:sp>
       <p:sp>
         <p:nvSpPr>
-          <p:cNvPr id="19" name="TextBox 18"/>
+          <p:cNvPr id="22" name="TextBox 21"/>
           <p:cNvSpPr txBox="1"/>
           <p:nvPr/>
         </p:nvSpPr>
@@ -23639,7 +25778,7 @@
       </p:sp>
       <p:sp>
         <p:nvSpPr>
-          <p:cNvPr id="20" name="Oval 19"/>
+          <p:cNvPr id="23" name="Oval 22"/>
           <p:cNvSpPr/>
           <p:nvPr/>
         </p:nvSpPr>
@@ -23692,7 +25831,7 @@
       </p:sp>
       <p:sp>
         <p:nvSpPr>
-          <p:cNvPr id="21" name="TextBox 20"/>
+          <p:cNvPr id="24" name="TextBox 23"/>
           <p:cNvSpPr txBox="1"/>
           <p:nvPr/>
         </p:nvSpPr>
@@ -24107,14 +26246,177 @@
       </p:pic>
       <p:sp>
         <p:nvSpPr>
-          <p:cNvPr id="11" name="TextBox 10"/>
+          <p:cNvPr id="11" name="Rounded Rectangle 10"/>
+          <p:cNvSpPr/>
+          <p:nvPr/>
+        </p:nvSpPr>
+        <p:spPr>
+          <a:xfrm>
+            <a:off x="411479" y="1444752"/>
+            <a:ext cx="11368735" cy="4800600"/>
+          </a:xfrm>
+          <a:prstGeom prst="roundRect">
+            <a:avLst>
+              <a:gd name="adj" fmla="val 4000"/>
+            </a:avLst>
+          </a:prstGeom>
+          <a:solidFill>
+            <a:srgbClr val="FFFFFF">
+              <a:alpha val="84000"/>
+            </a:srgbClr>
+          </a:solidFill>
+          <a:ln w="19050">
+            <a:solidFill>
+              <a:srgbClr val="FFFFFF"/>
+            </a:solidFill>
+          </a:ln>
+          <a:effectLst>
+            <a:outerShdw blurRad="203200" dist="50800" dir="5400000" algn="t" rotWithShape="0">
+              <a:srgbClr val="1A2340">
+                <a:alpha val="20000"/>
+              </a:srgbClr>
+            </a:outerShdw>
+          </a:effectLst>
+        </p:spPr>
+        <p:style>
+          <a:lnRef idx="1">
+            <a:schemeClr val="accent1"/>
+          </a:lnRef>
+          <a:fillRef idx="3">
+            <a:schemeClr val="accent1"/>
+          </a:fillRef>
+          <a:effectRef idx="2">
+            <a:schemeClr val="accent1"/>
+          </a:effectRef>
+          <a:fontRef idx="minor">
+            <a:schemeClr val="lt1"/>
+          </a:fontRef>
+        </p:style>
+        <p:txBody>
+          <a:bodyPr rtlCol="0" anchor="ctr"/>
+          <a:lstStyle/>
+          <a:p>
+            <a:pPr algn="ctr"/>
+          </a:p>
+        </p:txBody>
+      </p:sp>
+      <p:sp>
+        <p:nvSpPr>
+          <p:cNvPr id="12" name="Rounded Rectangle 11"/>
+          <p:cNvSpPr/>
+          <p:nvPr/>
+        </p:nvSpPr>
+        <p:spPr>
+          <a:xfrm>
+            <a:off x="731519" y="1508760"/>
+            <a:ext cx="10728655" cy="32004"/>
+          </a:xfrm>
+          <a:prstGeom prst="roundRect">
+            <a:avLst>
+              <a:gd name="adj" fmla="val 50000"/>
+            </a:avLst>
+          </a:prstGeom>
+          <a:solidFill>
+            <a:srgbClr val="FFFFFF">
+              <a:alpha val="85000"/>
+            </a:srgbClr>
+          </a:solidFill>
+          <a:ln>
+            <a:noFill/>
+          </a:ln>
+          <a:effectLst/>
+        </p:spPr>
+        <p:style>
+          <a:lnRef idx="1">
+            <a:schemeClr val="accent1"/>
+          </a:lnRef>
+          <a:fillRef idx="3">
+            <a:schemeClr val="accent1"/>
+          </a:fillRef>
+          <a:effectRef idx="2">
+            <a:schemeClr val="accent1"/>
+          </a:effectRef>
+          <a:fontRef idx="minor">
+            <a:schemeClr val="lt1"/>
+          </a:fontRef>
+        </p:style>
+        <p:txBody>
+          <a:bodyPr rtlCol="0" anchor="ctr"/>
+          <a:lstStyle/>
+          <a:p>
+            <a:pPr algn="ctr"/>
+          </a:p>
+        </p:txBody>
+      </p:sp>
+      <p:sp>
+        <p:nvSpPr>
+          <p:cNvPr id="13" name="Rounded Rectangle 12"/>
+          <p:cNvSpPr/>
+          <p:nvPr/>
+        </p:nvSpPr>
+        <p:spPr>
+          <a:xfrm>
+            <a:off x="548640" y="1591056"/>
+            <a:ext cx="64008" cy="873252"/>
+          </a:xfrm>
+          <a:prstGeom prst="roundRect">
+            <a:avLst>
+              <a:gd name="adj" fmla="val 50000"/>
+            </a:avLst>
+          </a:prstGeom>
+          <a:solidFill>
+            <a:srgbClr val="8D6A2A"/>
+          </a:solidFill>
+          <a:ln>
+            <a:noFill/>
+          </a:ln>
+          <a:effectLst>
+            <a:outerShdw blurRad="203200" dist="50800" dir="5400000" algn="t" rotWithShape="0">
+              <a:srgbClr val="1A2340">
+                <a:alpha val="20000"/>
+              </a:srgbClr>
+            </a:outerShdw>
+          </a:effectLst>
+          <a:scene3d>
+            <a:camera prst="orthographicFront"/>
+            <a:lightRig rig="threePt" dir="t"/>
+          </a:scene3d>
+          <a:sp3d>
+            <a:bevelT w="44450" h="25400" prst="softRound"/>
+          </a:sp3d>
+        </p:spPr>
+        <p:style>
+          <a:lnRef idx="1">
+            <a:schemeClr val="accent1"/>
+          </a:lnRef>
+          <a:fillRef idx="3">
+            <a:schemeClr val="accent1"/>
+          </a:fillRef>
+          <a:effectRef idx="2">
+            <a:schemeClr val="accent1"/>
+          </a:effectRef>
+          <a:fontRef idx="minor">
+            <a:schemeClr val="lt1"/>
+          </a:fontRef>
+        </p:style>
+        <p:txBody>
+          <a:bodyPr rtlCol="0" anchor="ctr"/>
+          <a:lstStyle/>
+          <a:p>
+            <a:pPr algn="ctr"/>
+          </a:p>
+        </p:txBody>
+      </p:sp>
+      <p:sp>
+        <p:nvSpPr>
+          <p:cNvPr id="14" name="TextBox 13"/>
           <p:cNvSpPr txBox="1"/>
           <p:nvPr/>
         </p:nvSpPr>
         <p:spPr>
           <a:xfrm>
-            <a:off x="548640" y="1554480"/>
-            <a:ext cx="11094415" cy="1092708"/>
+            <a:off x="777240" y="1554480"/>
+            <a:ext cx="10865815" cy="1092708"/>
           </a:xfrm>
           <a:prstGeom prst="rect">
             <a:avLst/>
@@ -24162,9 +26464,63 @@
           </a:p>
         </p:txBody>
       </p:sp>
+      <p:sp>
+        <p:nvSpPr>
+          <p:cNvPr id="15" name="Rounded Rectangle 14"/>
+          <p:cNvSpPr/>
+          <p:nvPr/>
+        </p:nvSpPr>
+        <p:spPr>
+          <a:xfrm>
+            <a:off x="548640" y="2830068"/>
+            <a:ext cx="11094415" cy="3342132"/>
+          </a:xfrm>
+          <a:prstGeom prst="roundRect">
+            <a:avLst>
+              <a:gd name="adj" fmla="val 3000"/>
+            </a:avLst>
+          </a:prstGeom>
+          <a:solidFill>
+            <a:srgbClr val="FFFFFF"/>
+          </a:solidFill>
+          <a:ln w="9525">
+            <a:solidFill>
+              <a:srgbClr val="DDDFEE"/>
+            </a:solidFill>
+          </a:ln>
+          <a:effectLst>
+            <a:outerShdw blurRad="203200" dist="50800" dir="5400000" algn="t" rotWithShape="0">
+              <a:srgbClr val="1A2340">
+                <a:alpha val="20000"/>
+              </a:srgbClr>
+            </a:outerShdw>
+          </a:effectLst>
+        </p:spPr>
+        <p:style>
+          <a:lnRef idx="1">
+            <a:schemeClr val="accent1"/>
+          </a:lnRef>
+          <a:fillRef idx="3">
+            <a:schemeClr val="accent1"/>
+          </a:fillRef>
+          <a:effectRef idx="2">
+            <a:schemeClr val="accent1"/>
+          </a:effectRef>
+          <a:fontRef idx="minor">
+            <a:schemeClr val="lt1"/>
+          </a:fontRef>
+        </p:style>
+        <p:txBody>
+          <a:bodyPr rtlCol="0" anchor="ctr"/>
+          <a:lstStyle/>
+          <a:p>
+            <a:pPr algn="ctr"/>
+          </a:p>
+        </p:txBody>
+      </p:sp>
       <p:pic>
         <p:nvPicPr>
-          <p:cNvPr id="12" name="Picture 11" descr="A central hub labelled general anaesthesia linked to five boxes: unconsciousness, amnesia, analgesia, muscle relaxation and loss of autonomic reflexes, each with example drugs."/>
+          <p:cNvPr id="16" name="Picture 15" descr="A central hub labelled general anaesthesia linked to five boxes: unconsciousness, amnesia, analgesia, muscle relaxation and loss of autonomic reflexes, each with example drugs."/>
           <p:cNvPicPr>
             <a:picLocks noChangeAspect="1"/>
           </p:cNvPicPr>
@@ -24178,8 +26534,8 @@
         </p:blipFill>
         <p:spPr>
           <a:xfrm>
-            <a:off x="3146727" y="2830068"/>
-            <a:ext cx="5898241" cy="2884932"/>
+            <a:off x="3333677" y="2939796"/>
+            <a:ext cx="5524341" cy="2702051"/>
           </a:xfrm>
           <a:prstGeom prst="rect">
             <a:avLst/>
@@ -24188,14 +26544,14 @@
       </p:pic>
       <p:sp>
         <p:nvSpPr>
-          <p:cNvPr id="13" name="TextBox 12"/>
+          <p:cNvPr id="17" name="TextBox 16"/>
           <p:cNvSpPr txBox="1"/>
           <p:nvPr/>
         </p:nvSpPr>
         <p:spPr>
           <a:xfrm>
-            <a:off x="548640" y="5806440"/>
-            <a:ext cx="11094415" cy="365760"/>
+            <a:off x="685800" y="5733286"/>
+            <a:ext cx="10820095" cy="365760"/>
           </a:xfrm>
           <a:prstGeom prst="rect">
             <a:avLst/>
@@ -24604,7 +26960,111 @@
       </p:pic>
       <p:sp>
         <p:nvSpPr>
-          <p:cNvPr id="11" name="Oval 10"/>
+          <p:cNvPr id="11" name="Rounded Rectangle 10"/>
+          <p:cNvSpPr/>
+          <p:nvPr/>
+        </p:nvSpPr>
+        <p:spPr>
+          <a:xfrm>
+            <a:off x="411479" y="1444752"/>
+            <a:ext cx="11368735" cy="4800600"/>
+          </a:xfrm>
+          <a:prstGeom prst="roundRect">
+            <a:avLst>
+              <a:gd name="adj" fmla="val 4000"/>
+            </a:avLst>
+          </a:prstGeom>
+          <a:solidFill>
+            <a:srgbClr val="FFFFFF">
+              <a:alpha val="84000"/>
+            </a:srgbClr>
+          </a:solidFill>
+          <a:ln w="19050">
+            <a:solidFill>
+              <a:srgbClr val="FFFFFF"/>
+            </a:solidFill>
+          </a:ln>
+          <a:effectLst>
+            <a:outerShdw blurRad="203200" dist="50800" dir="5400000" algn="t" rotWithShape="0">
+              <a:srgbClr val="1A2340">
+                <a:alpha val="20000"/>
+              </a:srgbClr>
+            </a:outerShdw>
+          </a:effectLst>
+        </p:spPr>
+        <p:style>
+          <a:lnRef idx="1">
+            <a:schemeClr val="accent1"/>
+          </a:lnRef>
+          <a:fillRef idx="3">
+            <a:schemeClr val="accent1"/>
+          </a:fillRef>
+          <a:effectRef idx="2">
+            <a:schemeClr val="accent1"/>
+          </a:effectRef>
+          <a:fontRef idx="minor">
+            <a:schemeClr val="lt1"/>
+          </a:fontRef>
+        </p:style>
+        <p:txBody>
+          <a:bodyPr rtlCol="0" anchor="ctr"/>
+          <a:lstStyle/>
+          <a:p>
+            <a:pPr algn="ctr"/>
+          </a:p>
+        </p:txBody>
+      </p:sp>
+      <p:sp>
+        <p:nvSpPr>
+          <p:cNvPr id="12" name="Rounded Rectangle 11"/>
+          <p:cNvSpPr/>
+          <p:nvPr/>
+        </p:nvSpPr>
+        <p:spPr>
+          <a:xfrm>
+            <a:off x="731519" y="1508760"/>
+            <a:ext cx="10728655" cy="32004"/>
+          </a:xfrm>
+          <a:prstGeom prst="roundRect">
+            <a:avLst>
+              <a:gd name="adj" fmla="val 50000"/>
+            </a:avLst>
+          </a:prstGeom>
+          <a:solidFill>
+            <a:srgbClr val="FFFFFF">
+              <a:alpha val="85000"/>
+            </a:srgbClr>
+          </a:solidFill>
+          <a:ln>
+            <a:noFill/>
+          </a:ln>
+          <a:effectLst/>
+        </p:spPr>
+        <p:style>
+          <a:lnRef idx="1">
+            <a:schemeClr val="accent1"/>
+          </a:lnRef>
+          <a:fillRef idx="3">
+            <a:schemeClr val="accent1"/>
+          </a:fillRef>
+          <a:effectRef idx="2">
+            <a:schemeClr val="accent1"/>
+          </a:effectRef>
+          <a:fontRef idx="minor">
+            <a:schemeClr val="lt1"/>
+          </a:fontRef>
+        </p:style>
+        <p:txBody>
+          <a:bodyPr rtlCol="0" anchor="ctr"/>
+          <a:lstStyle/>
+          <a:p>
+            <a:pPr algn="ctr"/>
+          </a:p>
+        </p:txBody>
+      </p:sp>
+      <p:sp>
+        <p:nvSpPr>
+          <p:cNvPr id="13" name="Oval 12"/>
           <p:cNvSpPr/>
           <p:nvPr/>
         </p:nvSpPr>
@@ -24657,7 +27117,7 @@
       </p:sp>
       <p:sp>
         <p:nvSpPr>
-          <p:cNvPr id="12" name="TextBox 11"/>
+          <p:cNvPr id="14" name="TextBox 13"/>
           <p:cNvSpPr txBox="1"/>
           <p:nvPr/>
         </p:nvSpPr>
@@ -24700,7 +27160,7 @@
       </p:sp>
       <p:sp>
         <p:nvSpPr>
-          <p:cNvPr id="13" name="Oval 12"/>
+          <p:cNvPr id="15" name="Oval 14"/>
           <p:cNvSpPr/>
           <p:nvPr/>
         </p:nvSpPr>
@@ -24753,7 +27213,7 @@
       </p:sp>
       <p:sp>
         <p:nvSpPr>
-          <p:cNvPr id="14" name="TextBox 13"/>
+          <p:cNvPr id="16" name="TextBox 15"/>
           <p:cNvSpPr txBox="1"/>
           <p:nvPr/>
         </p:nvSpPr>
@@ -24796,7 +27256,7 @@
       </p:sp>
       <p:sp>
         <p:nvSpPr>
-          <p:cNvPr id="15" name="Oval 14"/>
+          <p:cNvPr id="17" name="Oval 16"/>
           <p:cNvSpPr/>
           <p:nvPr/>
         </p:nvSpPr>
@@ -24849,7 +27309,7 @@
       </p:sp>
       <p:sp>
         <p:nvSpPr>
-          <p:cNvPr id="16" name="TextBox 15"/>
+          <p:cNvPr id="18" name="TextBox 17"/>
           <p:cNvSpPr txBox="1"/>
           <p:nvPr/>
         </p:nvSpPr>
@@ -24892,7 +27352,7 @@
       </p:sp>
       <p:sp>
         <p:nvSpPr>
-          <p:cNvPr id="17" name="Oval 16"/>
+          <p:cNvPr id="19" name="Oval 18"/>
           <p:cNvSpPr/>
           <p:nvPr/>
         </p:nvSpPr>
@@ -24945,7 +27405,7 @@
       </p:sp>
       <p:sp>
         <p:nvSpPr>
-          <p:cNvPr id="18" name="TextBox 17"/>
+          <p:cNvPr id="20" name="TextBox 19"/>
           <p:cNvSpPr txBox="1"/>
           <p:nvPr/>
         </p:nvSpPr>
@@ -25369,14 +27829,177 @@
       </p:pic>
       <p:sp>
         <p:nvSpPr>
-          <p:cNvPr id="11" name="TextBox 10"/>
+          <p:cNvPr id="11" name="Rounded Rectangle 10"/>
+          <p:cNvSpPr/>
+          <p:nvPr/>
+        </p:nvSpPr>
+        <p:spPr>
+          <a:xfrm>
+            <a:off x="411479" y="1444752"/>
+            <a:ext cx="11368735" cy="4800600"/>
+          </a:xfrm>
+          <a:prstGeom prst="roundRect">
+            <a:avLst>
+              <a:gd name="adj" fmla="val 4000"/>
+            </a:avLst>
+          </a:prstGeom>
+          <a:solidFill>
+            <a:srgbClr val="FFFFFF">
+              <a:alpha val="84000"/>
+            </a:srgbClr>
+          </a:solidFill>
+          <a:ln w="19050">
+            <a:solidFill>
+              <a:srgbClr val="FFFFFF"/>
+            </a:solidFill>
+          </a:ln>
+          <a:effectLst>
+            <a:outerShdw blurRad="203200" dist="50800" dir="5400000" algn="t" rotWithShape="0">
+              <a:srgbClr val="1A2340">
+                <a:alpha val="20000"/>
+              </a:srgbClr>
+            </a:outerShdw>
+          </a:effectLst>
+        </p:spPr>
+        <p:style>
+          <a:lnRef idx="1">
+            <a:schemeClr val="accent1"/>
+          </a:lnRef>
+          <a:fillRef idx="3">
+            <a:schemeClr val="accent1"/>
+          </a:fillRef>
+          <a:effectRef idx="2">
+            <a:schemeClr val="accent1"/>
+          </a:effectRef>
+          <a:fontRef idx="minor">
+            <a:schemeClr val="lt1"/>
+          </a:fontRef>
+        </p:style>
+        <p:txBody>
+          <a:bodyPr rtlCol="0" anchor="ctr"/>
+          <a:lstStyle/>
+          <a:p>
+            <a:pPr algn="ctr"/>
+          </a:p>
+        </p:txBody>
+      </p:sp>
+      <p:sp>
+        <p:nvSpPr>
+          <p:cNvPr id="12" name="Rounded Rectangle 11"/>
+          <p:cNvSpPr/>
+          <p:nvPr/>
+        </p:nvSpPr>
+        <p:spPr>
+          <a:xfrm>
+            <a:off x="731519" y="1508760"/>
+            <a:ext cx="10728655" cy="32004"/>
+          </a:xfrm>
+          <a:prstGeom prst="roundRect">
+            <a:avLst>
+              <a:gd name="adj" fmla="val 50000"/>
+            </a:avLst>
+          </a:prstGeom>
+          <a:solidFill>
+            <a:srgbClr val="FFFFFF">
+              <a:alpha val="85000"/>
+            </a:srgbClr>
+          </a:solidFill>
+          <a:ln>
+            <a:noFill/>
+          </a:ln>
+          <a:effectLst/>
+        </p:spPr>
+        <p:style>
+          <a:lnRef idx="1">
+            <a:schemeClr val="accent1"/>
+          </a:lnRef>
+          <a:fillRef idx="3">
+            <a:schemeClr val="accent1"/>
+          </a:fillRef>
+          <a:effectRef idx="2">
+            <a:schemeClr val="accent1"/>
+          </a:effectRef>
+          <a:fontRef idx="minor">
+            <a:schemeClr val="lt1"/>
+          </a:fontRef>
+        </p:style>
+        <p:txBody>
+          <a:bodyPr rtlCol="0" anchor="ctr"/>
+          <a:lstStyle/>
+          <a:p>
+            <a:pPr algn="ctr"/>
+          </a:p>
+        </p:txBody>
+      </p:sp>
+      <p:sp>
+        <p:nvSpPr>
+          <p:cNvPr id="13" name="Rounded Rectangle 12"/>
+          <p:cNvSpPr/>
+          <p:nvPr/>
+        </p:nvSpPr>
+        <p:spPr>
+          <a:xfrm>
+            <a:off x="548640" y="1591056"/>
+            <a:ext cx="64008" cy="315468"/>
+          </a:xfrm>
+          <a:prstGeom prst="roundRect">
+            <a:avLst>
+              <a:gd name="adj" fmla="val 50000"/>
+            </a:avLst>
+          </a:prstGeom>
+          <a:solidFill>
+            <a:srgbClr val="8D6A2A"/>
+          </a:solidFill>
+          <a:ln>
+            <a:noFill/>
+          </a:ln>
+          <a:effectLst>
+            <a:outerShdw blurRad="203200" dist="50800" dir="5400000" algn="t" rotWithShape="0">
+              <a:srgbClr val="1A2340">
+                <a:alpha val="20000"/>
+              </a:srgbClr>
+            </a:outerShdw>
+          </a:effectLst>
+          <a:scene3d>
+            <a:camera prst="orthographicFront"/>
+            <a:lightRig rig="threePt" dir="t"/>
+          </a:scene3d>
+          <a:sp3d>
+            <a:bevelT w="44450" h="25400" prst="softRound"/>
+          </a:sp3d>
+        </p:spPr>
+        <p:style>
+          <a:lnRef idx="1">
+            <a:schemeClr val="accent1"/>
+          </a:lnRef>
+          <a:fillRef idx="3">
+            <a:schemeClr val="accent1"/>
+          </a:fillRef>
+          <a:effectRef idx="2">
+            <a:schemeClr val="accent1"/>
+          </a:effectRef>
+          <a:fontRef idx="minor">
+            <a:schemeClr val="lt1"/>
+          </a:fontRef>
+        </p:style>
+        <p:txBody>
+          <a:bodyPr rtlCol="0" anchor="ctr"/>
+          <a:lstStyle/>
+          <a:p>
+            <a:pPr algn="ctr"/>
+          </a:p>
+        </p:txBody>
+      </p:sp>
+      <p:sp>
+        <p:nvSpPr>
+          <p:cNvPr id="14" name="TextBox 13"/>
           <p:cNvSpPr txBox="1"/>
           <p:nvPr/>
         </p:nvSpPr>
         <p:spPr>
           <a:xfrm>
-            <a:off x="548640" y="1554480"/>
-            <a:ext cx="11094415" cy="498348"/>
+            <a:off x="777240" y="1554480"/>
+            <a:ext cx="10865815" cy="498348"/>
           </a:xfrm>
           <a:prstGeom prst="rect">
             <a:avLst/>
@@ -25408,7 +28031,7 @@
       </p:sp>
       <p:graphicFrame>
         <p:nvGraphicFramePr>
-          <p:cNvPr id="12" name="Table 11"/>
+          <p:cNvPr id="15" name="Table 14"/>
           <p:cNvGraphicFramePr>
             <a:graphicFrameLocks noGrp="1"/>
           </p:cNvGraphicFramePr>
@@ -25997,9 +28620,113 @@
           </a:prstGeom>
         </p:spPr>
       </p:pic>
+      <p:sp>
+        <p:nvSpPr>
+          <p:cNvPr id="11" name="Rounded Rectangle 10"/>
+          <p:cNvSpPr/>
+          <p:nvPr/>
+        </p:nvSpPr>
+        <p:spPr>
+          <a:xfrm>
+            <a:off x="411479" y="1444752"/>
+            <a:ext cx="11368735" cy="4800600"/>
+          </a:xfrm>
+          <a:prstGeom prst="roundRect">
+            <a:avLst>
+              <a:gd name="adj" fmla="val 4000"/>
+            </a:avLst>
+          </a:prstGeom>
+          <a:solidFill>
+            <a:srgbClr val="FFFFFF">
+              <a:alpha val="84000"/>
+            </a:srgbClr>
+          </a:solidFill>
+          <a:ln w="19050">
+            <a:solidFill>
+              <a:srgbClr val="FFFFFF"/>
+            </a:solidFill>
+          </a:ln>
+          <a:effectLst>
+            <a:outerShdw blurRad="203200" dist="50800" dir="5400000" algn="t" rotWithShape="0">
+              <a:srgbClr val="1A2340">
+                <a:alpha val="20000"/>
+              </a:srgbClr>
+            </a:outerShdw>
+          </a:effectLst>
+        </p:spPr>
+        <p:style>
+          <a:lnRef idx="1">
+            <a:schemeClr val="accent1"/>
+          </a:lnRef>
+          <a:fillRef idx="3">
+            <a:schemeClr val="accent1"/>
+          </a:fillRef>
+          <a:effectRef idx="2">
+            <a:schemeClr val="accent1"/>
+          </a:effectRef>
+          <a:fontRef idx="minor">
+            <a:schemeClr val="lt1"/>
+          </a:fontRef>
+        </p:style>
+        <p:txBody>
+          <a:bodyPr rtlCol="0" anchor="ctr"/>
+          <a:lstStyle/>
+          <a:p>
+            <a:pPr algn="ctr"/>
+          </a:p>
+        </p:txBody>
+      </p:sp>
+      <p:sp>
+        <p:nvSpPr>
+          <p:cNvPr id="12" name="Rounded Rectangle 11"/>
+          <p:cNvSpPr/>
+          <p:nvPr/>
+        </p:nvSpPr>
+        <p:spPr>
+          <a:xfrm>
+            <a:off x="731519" y="1508760"/>
+            <a:ext cx="10728655" cy="32004"/>
+          </a:xfrm>
+          <a:prstGeom prst="roundRect">
+            <a:avLst>
+              <a:gd name="adj" fmla="val 50000"/>
+            </a:avLst>
+          </a:prstGeom>
+          <a:solidFill>
+            <a:srgbClr val="FFFFFF">
+              <a:alpha val="85000"/>
+            </a:srgbClr>
+          </a:solidFill>
+          <a:ln>
+            <a:noFill/>
+          </a:ln>
+          <a:effectLst/>
+        </p:spPr>
+        <p:style>
+          <a:lnRef idx="1">
+            <a:schemeClr val="accent1"/>
+          </a:lnRef>
+          <a:fillRef idx="3">
+            <a:schemeClr val="accent1"/>
+          </a:fillRef>
+          <a:effectRef idx="2">
+            <a:schemeClr val="accent1"/>
+          </a:effectRef>
+          <a:fontRef idx="minor">
+            <a:schemeClr val="lt1"/>
+          </a:fontRef>
+        </p:style>
+        <p:txBody>
+          <a:bodyPr rtlCol="0" anchor="ctr"/>
+          <a:lstStyle/>
+          <a:p>
+            <a:pPr algn="ctr"/>
+          </a:p>
+        </p:txBody>
+      </p:sp>
       <p:graphicFrame>
         <p:nvGraphicFramePr>
-          <p:cNvPr id="11" name="Table 10"/>
+          <p:cNvPr id="13" name="Table 12"/>
           <p:cNvGraphicFramePr>
             <a:graphicFrameLocks noGrp="1"/>
           </p:cNvGraphicFramePr>
@@ -27081,7 +29808,111 @@
       </p:pic>
       <p:sp>
         <p:nvSpPr>
-          <p:cNvPr id="11" name="Oval 10"/>
+          <p:cNvPr id="11" name="Rounded Rectangle 10"/>
+          <p:cNvSpPr/>
+          <p:nvPr/>
+        </p:nvSpPr>
+        <p:spPr>
+          <a:xfrm>
+            <a:off x="411479" y="1444752"/>
+            <a:ext cx="11368735" cy="4800600"/>
+          </a:xfrm>
+          <a:prstGeom prst="roundRect">
+            <a:avLst>
+              <a:gd name="adj" fmla="val 4000"/>
+            </a:avLst>
+          </a:prstGeom>
+          <a:solidFill>
+            <a:srgbClr val="FFFFFF">
+              <a:alpha val="84000"/>
+            </a:srgbClr>
+          </a:solidFill>
+          <a:ln w="19050">
+            <a:solidFill>
+              <a:srgbClr val="FFFFFF"/>
+            </a:solidFill>
+          </a:ln>
+          <a:effectLst>
+            <a:outerShdw blurRad="203200" dist="50800" dir="5400000" algn="t" rotWithShape="0">
+              <a:srgbClr val="1A2340">
+                <a:alpha val="20000"/>
+              </a:srgbClr>
+            </a:outerShdw>
+          </a:effectLst>
+        </p:spPr>
+        <p:style>
+          <a:lnRef idx="1">
+            <a:schemeClr val="accent1"/>
+          </a:lnRef>
+          <a:fillRef idx="3">
+            <a:schemeClr val="accent1"/>
+          </a:fillRef>
+          <a:effectRef idx="2">
+            <a:schemeClr val="accent1"/>
+          </a:effectRef>
+          <a:fontRef idx="minor">
+            <a:schemeClr val="lt1"/>
+          </a:fontRef>
+        </p:style>
+        <p:txBody>
+          <a:bodyPr rtlCol="0" anchor="ctr"/>
+          <a:lstStyle/>
+          <a:p>
+            <a:pPr algn="ctr"/>
+          </a:p>
+        </p:txBody>
+      </p:sp>
+      <p:sp>
+        <p:nvSpPr>
+          <p:cNvPr id="12" name="Rounded Rectangle 11"/>
+          <p:cNvSpPr/>
+          <p:nvPr/>
+        </p:nvSpPr>
+        <p:spPr>
+          <a:xfrm>
+            <a:off x="731519" y="1508760"/>
+            <a:ext cx="10728655" cy="32004"/>
+          </a:xfrm>
+          <a:prstGeom prst="roundRect">
+            <a:avLst>
+              <a:gd name="adj" fmla="val 50000"/>
+            </a:avLst>
+          </a:prstGeom>
+          <a:solidFill>
+            <a:srgbClr val="FFFFFF">
+              <a:alpha val="85000"/>
+            </a:srgbClr>
+          </a:solidFill>
+          <a:ln>
+            <a:noFill/>
+          </a:ln>
+          <a:effectLst/>
+        </p:spPr>
+        <p:style>
+          <a:lnRef idx="1">
+            <a:schemeClr val="accent1"/>
+          </a:lnRef>
+          <a:fillRef idx="3">
+            <a:schemeClr val="accent1"/>
+          </a:fillRef>
+          <a:effectRef idx="2">
+            <a:schemeClr val="accent1"/>
+          </a:effectRef>
+          <a:fontRef idx="minor">
+            <a:schemeClr val="lt1"/>
+          </a:fontRef>
+        </p:style>
+        <p:txBody>
+          <a:bodyPr rtlCol="0" anchor="ctr"/>
+          <a:lstStyle/>
+          <a:p>
+            <a:pPr algn="ctr"/>
+          </a:p>
+        </p:txBody>
+      </p:sp>
+      <p:sp>
+        <p:nvSpPr>
+          <p:cNvPr id="13" name="Oval 12"/>
           <p:cNvSpPr/>
           <p:nvPr/>
         </p:nvSpPr>
@@ -27134,7 +29965,7 @@
       </p:sp>
       <p:sp>
         <p:nvSpPr>
-          <p:cNvPr id="12" name="TextBox 11"/>
+          <p:cNvPr id="14" name="TextBox 13"/>
           <p:cNvSpPr txBox="1"/>
           <p:nvPr/>
         </p:nvSpPr>
@@ -27168,7 +29999,7 @@
       </p:sp>
       <p:sp>
         <p:nvSpPr>
-          <p:cNvPr id="13" name="Oval 12"/>
+          <p:cNvPr id="15" name="Oval 14"/>
           <p:cNvSpPr/>
           <p:nvPr/>
         </p:nvSpPr>
@@ -27221,7 +30052,7 @@
       </p:sp>
       <p:sp>
         <p:nvSpPr>
-          <p:cNvPr id="14" name="TextBox 13"/>
+          <p:cNvPr id="16" name="TextBox 15"/>
           <p:cNvSpPr txBox="1"/>
           <p:nvPr/>
         </p:nvSpPr>
@@ -27255,7 +30086,7 @@
       </p:sp>
       <p:sp>
         <p:nvSpPr>
-          <p:cNvPr id="15" name="Oval 14"/>
+          <p:cNvPr id="17" name="Oval 16"/>
           <p:cNvSpPr/>
           <p:nvPr/>
         </p:nvSpPr>
@@ -27308,7 +30139,7 @@
       </p:sp>
       <p:sp>
         <p:nvSpPr>
-          <p:cNvPr id="16" name="TextBox 15"/>
+          <p:cNvPr id="18" name="TextBox 17"/>
           <p:cNvSpPr txBox="1"/>
           <p:nvPr/>
         </p:nvSpPr>
@@ -27342,7 +30173,7 @@
       </p:sp>
       <p:sp>
         <p:nvSpPr>
-          <p:cNvPr id="17" name="Oval 16"/>
+          <p:cNvPr id="19" name="Oval 18"/>
           <p:cNvSpPr/>
           <p:nvPr/>
         </p:nvSpPr>
@@ -27395,7 +30226,7 @@
       </p:sp>
       <p:sp>
         <p:nvSpPr>
-          <p:cNvPr id="18" name="TextBox 17"/>
+          <p:cNvPr id="20" name="TextBox 19"/>
           <p:cNvSpPr txBox="1"/>
           <p:nvPr/>
         </p:nvSpPr>
@@ -27429,7 +30260,7 @@
       </p:sp>
       <p:sp>
         <p:nvSpPr>
-          <p:cNvPr id="19" name="Oval 18"/>
+          <p:cNvPr id="21" name="Oval 20"/>
           <p:cNvSpPr/>
           <p:nvPr/>
         </p:nvSpPr>
@@ -27482,7 +30313,7 @@
       </p:sp>
       <p:sp>
         <p:nvSpPr>
-          <p:cNvPr id="20" name="TextBox 19"/>
+          <p:cNvPr id="22" name="TextBox 21"/>
           <p:cNvSpPr txBox="1"/>
           <p:nvPr/>
         </p:nvSpPr>
